--- a/Team_Huddle_Premium.pptx
+++ b/Team_Huddle_Premium.pptx
@@ -3121,6 +3121,7 @@
           <a:ln>
             <a:noFill/>
           </a:ln>
+          <a:effectLst/>
         </p:spPr>
         <p:style>
           <a:lnRef idx="1">
@@ -3172,6 +3173,7 @@
           <a:ln>
             <a:noFill/>
           </a:ln>
+          <a:effectLst/>
         </p:spPr>
         <p:style>
           <a:lnRef idx="1">
@@ -3494,7 +3496,7 @@
     <p:bg>
       <p:bgPr>
         <a:solidFill>
-          <a:srgbClr val="FAFAFA"/>
+          <a:srgbClr val="FFFFFF"/>
         </a:solidFill>
         <a:effectLst/>
       </p:bgPr>
@@ -3508,14 +3510,836 @@
       <p:grpSpPr/>
       <p:sp>
         <p:nvSpPr>
-          <p:cNvPr id="2" name="Rectangle 1"/>
-          <p:cNvSpPr/>
-          <p:nvPr/>
-        </p:nvSpPr>
-        <p:spPr>
-          <a:xfrm>
-            <a:off x="0" y="0"/>
-            <a:ext cx="12191695" cy="1143000"/>
+          <p:cNvPr id="2" name="Rounded Rectangle 1"/>
+          <p:cNvSpPr/>
+          <p:nvPr/>
+        </p:nvSpPr>
+        <p:spPr>
+          <a:xfrm>
+            <a:off x="-457200" y="3474720"/>
+            <a:ext cx="12161520" cy="1371600"/>
+          </a:xfrm>
+          <a:prstGeom prst="roundRect">
+            <a:avLst>
+              <a:gd name="adj" fmla="val 20000"/>
+            </a:avLst>
+          </a:prstGeom>
+          <a:solidFill>
+            <a:srgbClr val="FFFFFF"/>
+          </a:solidFill>
+          <a:ln>
+            <a:noFill/>
+          </a:ln>
+          <a:effectLst>
+            <a:outerShdw blurRad="150000" dist="20000" dir="5400000" algn="ctr" rotWithShape="0">
+              <a:srgbClr val="000000">
+                <a:alpha val="10000"/>
+              </a:srgbClr>
+            </a:outerShdw>
+          </a:effectLst>
+        </p:spPr>
+        <p:style>
+          <a:lnRef idx="1">
+            <a:schemeClr val="accent1"/>
+          </a:lnRef>
+          <a:fillRef idx="3">
+            <a:schemeClr val="accent1"/>
+          </a:fillRef>
+          <a:effectRef idx="2">
+            <a:schemeClr val="accent1"/>
+          </a:effectRef>
+          <a:fontRef idx="minor">
+            <a:schemeClr val="lt1"/>
+          </a:fontRef>
+        </p:style>
+        <p:txBody>
+          <a:bodyPr rtlCol="0" anchor="ctr"/>
+          <a:lstStyle/>
+          <a:p>
+            <a:pPr algn="ctr"/>
+          </a:p>
+        </p:txBody>
+      </p:sp>
+      <p:pic>
+        <p:nvPicPr>
+          <p:cNvPr id="3" name="Picture 2" descr="timeline_waves.png"/>
+          <p:cNvPicPr>
+            <a:picLocks noChangeAspect="1"/>
+          </p:cNvPicPr>
+          <p:nvPr/>
+        </p:nvPicPr>
+        <p:blipFill>
+          <a:blip r:embed="rId2"/>
+          <a:stretch>
+            <a:fillRect/>
+          </a:stretch>
+        </p:blipFill>
+        <p:spPr>
+          <a:xfrm>
+            <a:off x="-457200" y="3474720"/>
+            <a:ext cx="4114800" cy="1371600"/>
+          </a:xfrm>
+          <a:prstGeom prst="rect">
+            <a:avLst/>
+          </a:prstGeom>
+        </p:spPr>
+      </p:pic>
+      <p:sp>
+        <p:nvSpPr>
+          <p:cNvPr id="4" name="Rounded Rectangle 3"/>
+          <p:cNvSpPr/>
+          <p:nvPr/>
+        </p:nvSpPr>
+        <p:spPr>
+          <a:xfrm>
+            <a:off x="365760" y="3291840"/>
+            <a:ext cx="2103120" cy="822960"/>
+          </a:xfrm>
+          <a:prstGeom prst="roundRect">
+            <a:avLst>
+              <a:gd name="adj" fmla="val 10000"/>
+            </a:avLst>
+          </a:prstGeom>
+          <a:solidFill>
+            <a:srgbClr val="FFFFFF"/>
+          </a:solidFill>
+          <a:ln>
+            <a:noFill/>
+          </a:ln>
+          <a:effectLst>
+            <a:outerShdw blurRad="150000" dist="20000" dir="5400000" algn="ctr" rotWithShape="0">
+              <a:srgbClr val="000000">
+                <a:alpha val="10000"/>
+              </a:srgbClr>
+            </a:outerShdw>
+          </a:effectLst>
+        </p:spPr>
+        <p:style>
+          <a:lnRef idx="1">
+            <a:schemeClr val="accent1"/>
+          </a:lnRef>
+          <a:fillRef idx="3">
+            <a:schemeClr val="accent1"/>
+          </a:fillRef>
+          <a:effectRef idx="2">
+            <a:schemeClr val="accent1"/>
+          </a:effectRef>
+          <a:fontRef idx="minor">
+            <a:schemeClr val="lt1"/>
+          </a:fontRef>
+        </p:style>
+        <p:txBody>
+          <a:bodyPr rtlCol="0" anchor="ctr"/>
+          <a:lstStyle/>
+          <a:p>
+            <a:pPr algn="ctr"/>
+          </a:p>
+        </p:txBody>
+      </p:sp>
+      <p:sp>
+        <p:nvSpPr>
+          <p:cNvPr id="5" name="Rectangle 4"/>
+          <p:cNvSpPr/>
+          <p:nvPr/>
+        </p:nvSpPr>
+        <p:spPr>
+          <a:xfrm>
+            <a:off x="365760" y="3520440"/>
+            <a:ext cx="54864" cy="365760"/>
+          </a:xfrm>
+          <a:prstGeom prst="rect">
+            <a:avLst/>
+          </a:prstGeom>
+          <a:solidFill>
+            <a:srgbClr val="39699A"/>
+          </a:solidFill>
+          <a:ln>
+            <a:noFill/>
+          </a:ln>
+          <a:effectLst/>
+        </p:spPr>
+        <p:style>
+          <a:lnRef idx="1">
+            <a:schemeClr val="accent1"/>
+          </a:lnRef>
+          <a:fillRef idx="3">
+            <a:schemeClr val="accent1"/>
+          </a:fillRef>
+          <a:effectRef idx="2">
+            <a:schemeClr val="accent1"/>
+          </a:effectRef>
+          <a:fontRef idx="minor">
+            <a:schemeClr val="lt1"/>
+          </a:fontRef>
+        </p:style>
+        <p:txBody>
+          <a:bodyPr rtlCol="0" anchor="ctr"/>
+          <a:lstStyle/>
+          <a:p>
+            <a:pPr algn="ctr"/>
+          </a:p>
+        </p:txBody>
+      </p:sp>
+      <p:sp>
+        <p:nvSpPr>
+          <p:cNvPr id="6" name="TextBox 5"/>
+          <p:cNvSpPr txBox="1"/>
+          <p:nvPr/>
+        </p:nvSpPr>
+        <p:spPr>
+          <a:xfrm>
+            <a:off x="457200" y="3474720"/>
+            <a:ext cx="731520" cy="457200"/>
+          </a:xfrm>
+          <a:prstGeom prst="rect">
+            <a:avLst/>
+          </a:prstGeom>
+          <a:noFill/>
+          <a:effectLst/>
+        </p:spPr>
+        <p:txBody>
+          <a:bodyPr wrap="square">
+            <a:spAutoFit/>
+          </a:bodyPr>
+          <a:lstStyle/>
+          <a:p>
+            <a:pPr algn="l">
+              <a:defRPr sz="2200" b="1">
+                <a:solidFill>
+                  <a:srgbClr val="39699A"/>
+                </a:solidFill>
+                <a:latin typeface="Segoe UI Semibold"/>
+              </a:defRPr>
+            </a:pPr>
+            <a:r>
+              <a:t>2026</a:t>
+            </a:r>
+          </a:p>
+        </p:txBody>
+      </p:sp>
+      <p:sp>
+        <p:nvSpPr>
+          <p:cNvPr id="7" name="Rectangle 6"/>
+          <p:cNvSpPr/>
+          <p:nvPr/>
+        </p:nvSpPr>
+        <p:spPr>
+          <a:xfrm>
+            <a:off x="1234440" y="3429000"/>
+            <a:ext cx="9144" cy="548640"/>
+          </a:xfrm>
+          <a:prstGeom prst="rect">
+            <a:avLst/>
+          </a:prstGeom>
+          <a:solidFill>
+            <a:srgbClr val="D9D9D9"/>
+          </a:solidFill>
+          <a:ln>
+            <a:noFill/>
+          </a:ln>
+          <a:effectLst/>
+        </p:spPr>
+        <p:style>
+          <a:lnRef idx="1">
+            <a:schemeClr val="accent1"/>
+          </a:lnRef>
+          <a:fillRef idx="3">
+            <a:schemeClr val="accent1"/>
+          </a:fillRef>
+          <a:effectRef idx="2">
+            <a:schemeClr val="accent1"/>
+          </a:effectRef>
+          <a:fontRef idx="minor">
+            <a:schemeClr val="lt1"/>
+          </a:fontRef>
+        </p:style>
+        <p:txBody>
+          <a:bodyPr rtlCol="0" anchor="ctr"/>
+          <a:lstStyle/>
+          <a:p>
+            <a:pPr algn="ctr"/>
+          </a:p>
+        </p:txBody>
+      </p:sp>
+      <p:sp>
+        <p:nvSpPr>
+          <p:cNvPr id="8" name="TextBox 7"/>
+          <p:cNvSpPr txBox="1"/>
+          <p:nvPr/>
+        </p:nvSpPr>
+        <p:spPr>
+          <a:xfrm>
+            <a:off x="1280160" y="3429000"/>
+            <a:ext cx="1097280" cy="548640"/>
+          </a:xfrm>
+          <a:prstGeom prst="rect">
+            <a:avLst/>
+          </a:prstGeom>
+          <a:noFill/>
+          <a:effectLst/>
+        </p:spPr>
+        <p:txBody>
+          <a:bodyPr wrap="square">
+            <a:spAutoFit/>
+          </a:bodyPr>
+          <a:lstStyle/>
+          <a:p>
+            <a:pPr algn="l">
+              <a:defRPr sz="1200" b="1">
+                <a:solidFill>
+                  <a:srgbClr val="222222"/>
+                </a:solidFill>
+                <a:latin typeface="Segoe UI Semibold"/>
+              </a:defRPr>
+            </a:pPr>
+            <a:r>
+              <a:t>Execution</a:t>
+            </a:r>
+            <a:br/>
+            <a:r>
+              <a:t>Themes</a:t>
+            </a:r>
+          </a:p>
+        </p:txBody>
+      </p:sp>
+      <p:sp>
+        <p:nvSpPr>
+          <p:cNvPr id="9" name="Oval 8"/>
+          <p:cNvSpPr/>
+          <p:nvPr/>
+        </p:nvSpPr>
+        <p:spPr>
+          <a:xfrm>
+            <a:off x="11247120" y="3931920"/>
+            <a:ext cx="36576" cy="36576"/>
+          </a:xfrm>
+          <a:prstGeom prst="ellipse">
+            <a:avLst/>
+          </a:prstGeom>
+          <a:solidFill>
+            <a:srgbClr val="D9D9D9"/>
+          </a:solidFill>
+          <a:ln>
+            <a:noFill/>
+          </a:ln>
+          <a:effectLst/>
+        </p:spPr>
+        <p:style>
+          <a:lnRef idx="1">
+            <a:schemeClr val="accent1"/>
+          </a:lnRef>
+          <a:fillRef idx="3">
+            <a:schemeClr val="accent1"/>
+          </a:fillRef>
+          <a:effectRef idx="2">
+            <a:schemeClr val="accent1"/>
+          </a:effectRef>
+          <a:fontRef idx="minor">
+            <a:schemeClr val="lt1"/>
+          </a:fontRef>
+        </p:style>
+        <p:txBody>
+          <a:bodyPr rtlCol="0" anchor="ctr"/>
+          <a:lstStyle/>
+          <a:p>
+            <a:pPr algn="ctr"/>
+          </a:p>
+        </p:txBody>
+      </p:sp>
+      <p:sp>
+        <p:nvSpPr>
+          <p:cNvPr id="10" name="Oval 9"/>
+          <p:cNvSpPr/>
+          <p:nvPr/>
+        </p:nvSpPr>
+        <p:spPr>
+          <a:xfrm>
+            <a:off x="11247120" y="4041648"/>
+            <a:ext cx="36576" cy="36576"/>
+          </a:xfrm>
+          <a:prstGeom prst="ellipse">
+            <a:avLst/>
+          </a:prstGeom>
+          <a:solidFill>
+            <a:srgbClr val="D9D9D9"/>
+          </a:solidFill>
+          <a:ln>
+            <a:noFill/>
+          </a:ln>
+          <a:effectLst/>
+        </p:spPr>
+        <p:style>
+          <a:lnRef idx="1">
+            <a:schemeClr val="accent1"/>
+          </a:lnRef>
+          <a:fillRef idx="3">
+            <a:schemeClr val="accent1"/>
+          </a:fillRef>
+          <a:effectRef idx="2">
+            <a:schemeClr val="accent1"/>
+          </a:effectRef>
+          <a:fontRef idx="minor">
+            <a:schemeClr val="lt1"/>
+          </a:fontRef>
+        </p:style>
+        <p:txBody>
+          <a:bodyPr rtlCol="0" anchor="ctr"/>
+          <a:lstStyle/>
+          <a:p>
+            <a:pPr algn="ctr"/>
+          </a:p>
+        </p:txBody>
+      </p:sp>
+      <p:sp>
+        <p:nvSpPr>
+          <p:cNvPr id="11" name="Oval 10"/>
+          <p:cNvSpPr/>
+          <p:nvPr/>
+        </p:nvSpPr>
+        <p:spPr>
+          <a:xfrm>
+            <a:off x="11247120" y="4151376"/>
+            <a:ext cx="36576" cy="36576"/>
+          </a:xfrm>
+          <a:prstGeom prst="ellipse">
+            <a:avLst/>
+          </a:prstGeom>
+          <a:solidFill>
+            <a:srgbClr val="D9D9D9"/>
+          </a:solidFill>
+          <a:ln>
+            <a:noFill/>
+          </a:ln>
+          <a:effectLst/>
+        </p:spPr>
+        <p:style>
+          <a:lnRef idx="1">
+            <a:schemeClr val="accent1"/>
+          </a:lnRef>
+          <a:fillRef idx="3">
+            <a:schemeClr val="accent1"/>
+          </a:fillRef>
+          <a:effectRef idx="2">
+            <a:schemeClr val="accent1"/>
+          </a:effectRef>
+          <a:fontRef idx="minor">
+            <a:schemeClr val="lt1"/>
+          </a:fontRef>
+        </p:style>
+        <p:txBody>
+          <a:bodyPr rtlCol="0" anchor="ctr"/>
+          <a:lstStyle/>
+          <a:p>
+            <a:pPr algn="ctr"/>
+          </a:p>
+        </p:txBody>
+      </p:sp>
+      <p:sp>
+        <p:nvSpPr>
+          <p:cNvPr id="12" name="Oval 11"/>
+          <p:cNvSpPr/>
+          <p:nvPr/>
+        </p:nvSpPr>
+        <p:spPr>
+          <a:xfrm>
+            <a:off x="11247120" y="4261104"/>
+            <a:ext cx="36576" cy="36576"/>
+          </a:xfrm>
+          <a:prstGeom prst="ellipse">
+            <a:avLst/>
+          </a:prstGeom>
+          <a:solidFill>
+            <a:srgbClr val="D9D9D9"/>
+          </a:solidFill>
+          <a:ln>
+            <a:noFill/>
+          </a:ln>
+          <a:effectLst/>
+        </p:spPr>
+        <p:style>
+          <a:lnRef idx="1">
+            <a:schemeClr val="accent1"/>
+          </a:lnRef>
+          <a:fillRef idx="3">
+            <a:schemeClr val="accent1"/>
+          </a:fillRef>
+          <a:effectRef idx="2">
+            <a:schemeClr val="accent1"/>
+          </a:effectRef>
+          <a:fontRef idx="minor">
+            <a:schemeClr val="lt1"/>
+          </a:fontRef>
+        </p:style>
+        <p:txBody>
+          <a:bodyPr rtlCol="0" anchor="ctr"/>
+          <a:lstStyle/>
+          <a:p>
+            <a:pPr algn="ctr"/>
+          </a:p>
+        </p:txBody>
+      </p:sp>
+      <p:sp>
+        <p:nvSpPr>
+          <p:cNvPr id="13" name="Oval 12"/>
+          <p:cNvSpPr/>
+          <p:nvPr/>
+        </p:nvSpPr>
+        <p:spPr>
+          <a:xfrm>
+            <a:off x="11356848" y="3931920"/>
+            <a:ext cx="36576" cy="36576"/>
+          </a:xfrm>
+          <a:prstGeom prst="ellipse">
+            <a:avLst/>
+          </a:prstGeom>
+          <a:solidFill>
+            <a:srgbClr val="D9D9D9"/>
+          </a:solidFill>
+          <a:ln>
+            <a:noFill/>
+          </a:ln>
+          <a:effectLst/>
+        </p:spPr>
+        <p:style>
+          <a:lnRef idx="1">
+            <a:schemeClr val="accent1"/>
+          </a:lnRef>
+          <a:fillRef idx="3">
+            <a:schemeClr val="accent1"/>
+          </a:fillRef>
+          <a:effectRef idx="2">
+            <a:schemeClr val="accent1"/>
+          </a:effectRef>
+          <a:fontRef idx="minor">
+            <a:schemeClr val="lt1"/>
+          </a:fontRef>
+        </p:style>
+        <p:txBody>
+          <a:bodyPr rtlCol="0" anchor="ctr"/>
+          <a:lstStyle/>
+          <a:p>
+            <a:pPr algn="ctr"/>
+          </a:p>
+        </p:txBody>
+      </p:sp>
+      <p:sp>
+        <p:nvSpPr>
+          <p:cNvPr id="14" name="Oval 13"/>
+          <p:cNvSpPr/>
+          <p:nvPr/>
+        </p:nvSpPr>
+        <p:spPr>
+          <a:xfrm>
+            <a:off x="11356848" y="4041648"/>
+            <a:ext cx="36576" cy="36576"/>
+          </a:xfrm>
+          <a:prstGeom prst="ellipse">
+            <a:avLst/>
+          </a:prstGeom>
+          <a:solidFill>
+            <a:srgbClr val="D9D9D9"/>
+          </a:solidFill>
+          <a:ln>
+            <a:noFill/>
+          </a:ln>
+          <a:effectLst/>
+        </p:spPr>
+        <p:style>
+          <a:lnRef idx="1">
+            <a:schemeClr val="accent1"/>
+          </a:lnRef>
+          <a:fillRef idx="3">
+            <a:schemeClr val="accent1"/>
+          </a:fillRef>
+          <a:effectRef idx="2">
+            <a:schemeClr val="accent1"/>
+          </a:effectRef>
+          <a:fontRef idx="minor">
+            <a:schemeClr val="lt1"/>
+          </a:fontRef>
+        </p:style>
+        <p:txBody>
+          <a:bodyPr rtlCol="0" anchor="ctr"/>
+          <a:lstStyle/>
+          <a:p>
+            <a:pPr algn="ctr"/>
+          </a:p>
+        </p:txBody>
+      </p:sp>
+      <p:sp>
+        <p:nvSpPr>
+          <p:cNvPr id="15" name="Oval 14"/>
+          <p:cNvSpPr/>
+          <p:nvPr/>
+        </p:nvSpPr>
+        <p:spPr>
+          <a:xfrm>
+            <a:off x="11356848" y="4151376"/>
+            <a:ext cx="36576" cy="36576"/>
+          </a:xfrm>
+          <a:prstGeom prst="ellipse">
+            <a:avLst/>
+          </a:prstGeom>
+          <a:solidFill>
+            <a:srgbClr val="D9D9D9"/>
+          </a:solidFill>
+          <a:ln>
+            <a:noFill/>
+          </a:ln>
+          <a:effectLst/>
+        </p:spPr>
+        <p:style>
+          <a:lnRef idx="1">
+            <a:schemeClr val="accent1"/>
+          </a:lnRef>
+          <a:fillRef idx="3">
+            <a:schemeClr val="accent1"/>
+          </a:fillRef>
+          <a:effectRef idx="2">
+            <a:schemeClr val="accent1"/>
+          </a:effectRef>
+          <a:fontRef idx="minor">
+            <a:schemeClr val="lt1"/>
+          </a:fontRef>
+        </p:style>
+        <p:txBody>
+          <a:bodyPr rtlCol="0" anchor="ctr"/>
+          <a:lstStyle/>
+          <a:p>
+            <a:pPr algn="ctr"/>
+          </a:p>
+        </p:txBody>
+      </p:sp>
+      <p:sp>
+        <p:nvSpPr>
+          <p:cNvPr id="16" name="Oval 15"/>
+          <p:cNvSpPr/>
+          <p:nvPr/>
+        </p:nvSpPr>
+        <p:spPr>
+          <a:xfrm>
+            <a:off x="11356848" y="4261104"/>
+            <a:ext cx="36576" cy="36576"/>
+          </a:xfrm>
+          <a:prstGeom prst="ellipse">
+            <a:avLst/>
+          </a:prstGeom>
+          <a:solidFill>
+            <a:srgbClr val="D9D9D9"/>
+          </a:solidFill>
+          <a:ln>
+            <a:noFill/>
+          </a:ln>
+          <a:effectLst/>
+        </p:spPr>
+        <p:style>
+          <a:lnRef idx="1">
+            <a:schemeClr val="accent1"/>
+          </a:lnRef>
+          <a:fillRef idx="3">
+            <a:schemeClr val="accent1"/>
+          </a:fillRef>
+          <a:effectRef idx="2">
+            <a:schemeClr val="accent1"/>
+          </a:effectRef>
+          <a:fontRef idx="minor">
+            <a:schemeClr val="lt1"/>
+          </a:fontRef>
+        </p:style>
+        <p:txBody>
+          <a:bodyPr rtlCol="0" anchor="ctr"/>
+          <a:lstStyle/>
+          <a:p>
+            <a:pPr algn="ctr"/>
+          </a:p>
+        </p:txBody>
+      </p:sp>
+      <p:sp>
+        <p:nvSpPr>
+          <p:cNvPr id="17" name="Oval 16"/>
+          <p:cNvSpPr/>
+          <p:nvPr/>
+        </p:nvSpPr>
+        <p:spPr>
+          <a:xfrm>
+            <a:off x="11466576" y="3931920"/>
+            <a:ext cx="36576" cy="36576"/>
+          </a:xfrm>
+          <a:prstGeom prst="ellipse">
+            <a:avLst/>
+          </a:prstGeom>
+          <a:solidFill>
+            <a:srgbClr val="D9D9D9"/>
+          </a:solidFill>
+          <a:ln>
+            <a:noFill/>
+          </a:ln>
+          <a:effectLst/>
+        </p:spPr>
+        <p:style>
+          <a:lnRef idx="1">
+            <a:schemeClr val="accent1"/>
+          </a:lnRef>
+          <a:fillRef idx="3">
+            <a:schemeClr val="accent1"/>
+          </a:fillRef>
+          <a:effectRef idx="2">
+            <a:schemeClr val="accent1"/>
+          </a:effectRef>
+          <a:fontRef idx="minor">
+            <a:schemeClr val="lt1"/>
+          </a:fontRef>
+        </p:style>
+        <p:txBody>
+          <a:bodyPr rtlCol="0" anchor="ctr"/>
+          <a:lstStyle/>
+          <a:p>
+            <a:pPr algn="ctr"/>
+          </a:p>
+        </p:txBody>
+      </p:sp>
+      <p:sp>
+        <p:nvSpPr>
+          <p:cNvPr id="18" name="Oval 17"/>
+          <p:cNvSpPr/>
+          <p:nvPr/>
+        </p:nvSpPr>
+        <p:spPr>
+          <a:xfrm>
+            <a:off x="11466576" y="4041648"/>
+            <a:ext cx="36576" cy="36576"/>
+          </a:xfrm>
+          <a:prstGeom prst="ellipse">
+            <a:avLst/>
+          </a:prstGeom>
+          <a:solidFill>
+            <a:srgbClr val="D9D9D9"/>
+          </a:solidFill>
+          <a:ln>
+            <a:noFill/>
+          </a:ln>
+          <a:effectLst/>
+        </p:spPr>
+        <p:style>
+          <a:lnRef idx="1">
+            <a:schemeClr val="accent1"/>
+          </a:lnRef>
+          <a:fillRef idx="3">
+            <a:schemeClr val="accent1"/>
+          </a:fillRef>
+          <a:effectRef idx="2">
+            <a:schemeClr val="accent1"/>
+          </a:effectRef>
+          <a:fontRef idx="minor">
+            <a:schemeClr val="lt1"/>
+          </a:fontRef>
+        </p:style>
+        <p:txBody>
+          <a:bodyPr rtlCol="0" anchor="ctr"/>
+          <a:lstStyle/>
+          <a:p>
+            <a:pPr algn="ctr"/>
+          </a:p>
+        </p:txBody>
+      </p:sp>
+      <p:sp>
+        <p:nvSpPr>
+          <p:cNvPr id="19" name="Oval 18"/>
+          <p:cNvSpPr/>
+          <p:nvPr/>
+        </p:nvSpPr>
+        <p:spPr>
+          <a:xfrm>
+            <a:off x="11466576" y="4151376"/>
+            <a:ext cx="36576" cy="36576"/>
+          </a:xfrm>
+          <a:prstGeom prst="ellipse">
+            <a:avLst/>
+          </a:prstGeom>
+          <a:solidFill>
+            <a:srgbClr val="D9D9D9"/>
+          </a:solidFill>
+          <a:ln>
+            <a:noFill/>
+          </a:ln>
+          <a:effectLst/>
+        </p:spPr>
+        <p:style>
+          <a:lnRef idx="1">
+            <a:schemeClr val="accent1"/>
+          </a:lnRef>
+          <a:fillRef idx="3">
+            <a:schemeClr val="accent1"/>
+          </a:fillRef>
+          <a:effectRef idx="2">
+            <a:schemeClr val="accent1"/>
+          </a:effectRef>
+          <a:fontRef idx="minor">
+            <a:schemeClr val="lt1"/>
+          </a:fontRef>
+        </p:style>
+        <p:txBody>
+          <a:bodyPr rtlCol="0" anchor="ctr"/>
+          <a:lstStyle/>
+          <a:p>
+            <a:pPr algn="ctr"/>
+          </a:p>
+        </p:txBody>
+      </p:sp>
+      <p:sp>
+        <p:nvSpPr>
+          <p:cNvPr id="20" name="Oval 19"/>
+          <p:cNvSpPr/>
+          <p:nvPr/>
+        </p:nvSpPr>
+        <p:spPr>
+          <a:xfrm>
+            <a:off x="11466576" y="4261104"/>
+            <a:ext cx="36576" cy="36576"/>
+          </a:xfrm>
+          <a:prstGeom prst="ellipse">
+            <a:avLst/>
+          </a:prstGeom>
+          <a:solidFill>
+            <a:srgbClr val="D9D9D9"/>
+          </a:solidFill>
+          <a:ln>
+            <a:noFill/>
+          </a:ln>
+          <a:effectLst/>
+        </p:spPr>
+        <p:style>
+          <a:lnRef idx="1">
+            <a:schemeClr val="accent1"/>
+          </a:lnRef>
+          <a:fillRef idx="3">
+            <a:schemeClr val="accent1"/>
+          </a:fillRef>
+          <a:effectRef idx="2">
+            <a:schemeClr val="accent1"/>
+          </a:effectRef>
+          <a:fontRef idx="minor">
+            <a:schemeClr val="lt1"/>
+          </a:fontRef>
+        </p:style>
+        <p:txBody>
+          <a:bodyPr rtlCol="0" anchor="ctr"/>
+          <a:lstStyle/>
+          <a:p>
+            <a:pPr algn="ctr"/>
+          </a:p>
+        </p:txBody>
+      </p:sp>
+      <p:sp>
+        <p:nvSpPr>
+          <p:cNvPr id="21" name="Rectangle 20"/>
+          <p:cNvSpPr/>
+          <p:nvPr/>
+        </p:nvSpPr>
+        <p:spPr>
+          <a:xfrm>
+            <a:off x="2743200" y="4142232"/>
+            <a:ext cx="1755648" cy="36576"/>
           </a:xfrm>
           <a:prstGeom prst="rect">
             <a:avLst/>
@@ -3523,10 +4347,10 @@
           <a:gradFill rotWithShape="1">
             <a:gsLst>
               <a:gs pos="0">
-                <a:srgbClr val="FBCE07"/>
+                <a:srgbClr val="39699A"/>
               </a:gs>
               <a:gs pos="100000">
-                <a:srgbClr val="E0B300"/>
+                <a:srgbClr val="4EA0A6"/>
               </a:gs>
             </a:gsLst>
             <a:lin scaled="0"/>
@@ -3534,172 +4358,40 @@
           <a:ln>
             <a:noFill/>
           </a:ln>
-        </p:spPr>
-        <p:style>
-          <a:lnRef idx="1">
-            <a:schemeClr val="accent1"/>
-          </a:lnRef>
-          <a:fillRef idx="3">
-            <a:schemeClr val="accent1"/>
-          </a:fillRef>
-          <a:effectRef idx="2">
-            <a:schemeClr val="accent1"/>
-          </a:effectRef>
-          <a:fontRef idx="minor">
-            <a:schemeClr val="lt1"/>
-          </a:fontRef>
-        </p:style>
-        <p:txBody>
-          <a:bodyPr rtlCol="0" anchor="ctr"/>
-          <a:lstStyle/>
-          <a:p>
-            <a:pPr algn="ctr"/>
-          </a:p>
-        </p:txBody>
-      </p:sp>
-      <p:sp>
-        <p:nvSpPr>
-          <p:cNvPr id="3" name="Rectangle 2"/>
-          <p:cNvSpPr/>
-          <p:nvPr/>
-        </p:nvSpPr>
-        <p:spPr>
-          <a:xfrm>
-            <a:off x="0" y="0"/>
-            <a:ext cx="6400800" cy="1143000"/>
-          </a:xfrm>
-          <a:prstGeom prst="rect">
-            <a:avLst/>
-          </a:prstGeom>
-          <a:solidFill>
-            <a:srgbClr val="FFE866">
-              <a:alpha val="25000"/>
-            </a:srgbClr>
-          </a:solidFill>
-          <a:ln>
-            <a:noFill/>
-          </a:ln>
-        </p:spPr>
-        <p:style>
-          <a:lnRef idx="1">
-            <a:schemeClr val="accent1"/>
-          </a:lnRef>
-          <a:fillRef idx="3">
-            <a:schemeClr val="accent1"/>
-          </a:fillRef>
-          <a:effectRef idx="2">
-            <a:schemeClr val="accent1"/>
-          </a:effectRef>
-          <a:fontRef idx="minor">
-            <a:schemeClr val="lt1"/>
-          </a:fontRef>
-        </p:style>
-        <p:txBody>
-          <a:bodyPr rtlCol="0" anchor="ctr"/>
-          <a:lstStyle/>
-          <a:p>
-            <a:pPr algn="ctr"/>
-          </a:p>
-        </p:txBody>
-      </p:sp>
-      <p:sp>
-        <p:nvSpPr>
-          <p:cNvPr id="4" name="Oval 3"/>
-          <p:cNvSpPr/>
-          <p:nvPr/>
-        </p:nvSpPr>
-        <p:spPr>
-          <a:xfrm>
-            <a:off x="457200" y="228600"/>
-            <a:ext cx="502920" cy="502920"/>
-          </a:xfrm>
-          <a:prstGeom prst="ellipse">
-            <a:avLst/>
-          </a:prstGeom>
-          <a:solidFill>
-            <a:srgbClr val="E0B300"/>
-          </a:solidFill>
-          <a:ln>
-            <a:noFill/>
-          </a:ln>
-          <a:effectLst/>
-        </p:spPr>
-        <p:style>
-          <a:lnRef idx="1">
-            <a:schemeClr val="accent1"/>
-          </a:lnRef>
-          <a:fillRef idx="3">
-            <a:schemeClr val="accent1"/>
-          </a:fillRef>
-          <a:effectRef idx="2">
-            <a:schemeClr val="accent1"/>
-          </a:effectRef>
-          <a:fontRef idx="minor">
-            <a:schemeClr val="lt1"/>
-          </a:fontRef>
-        </p:style>
-        <p:txBody>
-          <a:bodyPr rtlCol="0" anchor="ctr"/>
-          <a:lstStyle/>
-          <a:p>
-            <a:pPr algn="ctr"/>
-          </a:p>
-        </p:txBody>
-      </p:sp>
-      <p:sp>
-        <p:nvSpPr>
-          <p:cNvPr id="5" name="Oval 4"/>
-          <p:cNvSpPr/>
-          <p:nvPr/>
-        </p:nvSpPr>
-        <p:spPr>
-          <a:xfrm>
-            <a:off x="530352" y="301752"/>
-            <a:ext cx="356616" cy="356616"/>
-          </a:xfrm>
-          <a:prstGeom prst="ellipse">
-            <a:avLst/>
-          </a:prstGeom>
-          <a:solidFill>
-            <a:srgbClr val="DD1D21"/>
-          </a:solidFill>
-          <a:ln>
-            <a:noFill/>
-          </a:ln>
-          <a:effectLst/>
-        </p:spPr>
-        <p:style>
-          <a:lnRef idx="1">
-            <a:schemeClr val="accent1"/>
-          </a:lnRef>
-          <a:fillRef idx="3">
-            <a:schemeClr val="accent1"/>
-          </a:fillRef>
-          <a:effectRef idx="2">
-            <a:schemeClr val="accent1"/>
-          </a:effectRef>
-          <a:fontRef idx="minor">
-            <a:schemeClr val="lt1"/>
-          </a:fontRef>
-        </p:style>
-        <p:txBody>
-          <a:bodyPr rtlCol="0" anchor="ctr"/>
-          <a:lstStyle/>
-          <a:p>
-            <a:pPr algn="ctr"/>
-          </a:p>
-        </p:txBody>
-      </p:sp>
-      <p:sp>
-        <p:nvSpPr>
-          <p:cNvPr id="6" name="TextBox 5"/>
+          <a:effectLst/>
+        </p:spPr>
+        <p:style>
+          <a:lnRef idx="1">
+            <a:schemeClr val="accent1"/>
+          </a:lnRef>
+          <a:fillRef idx="3">
+            <a:schemeClr val="accent1"/>
+          </a:fillRef>
+          <a:effectRef idx="2">
+            <a:schemeClr val="accent1"/>
+          </a:effectRef>
+          <a:fontRef idx="minor">
+            <a:schemeClr val="lt1"/>
+          </a:fontRef>
+        </p:style>
+        <p:txBody>
+          <a:bodyPr rtlCol="0" anchor="ctr"/>
+          <a:lstStyle/>
+          <a:p>
+            <a:pPr algn="ctr"/>
+          </a:p>
+        </p:txBody>
+      </p:sp>
+      <p:sp>
+        <p:nvSpPr>
+          <p:cNvPr id="22" name="TextBox 21"/>
           <p:cNvSpPr txBox="1"/>
           <p:nvPr/>
         </p:nvSpPr>
         <p:spPr>
           <a:xfrm>
-            <a:off x="1143000" y="256032"/>
-            <a:ext cx="9144000" cy="685800"/>
+            <a:off x="3429000" y="3995928"/>
+            <a:ext cx="365760" cy="365760"/>
           </a:xfrm>
           <a:prstGeom prst="rect">
             <a:avLst/>
@@ -3713,8 +4405,952 @@
           </a:bodyPr>
           <a:lstStyle/>
           <a:p>
-            <a:pPr algn="l">
-              <a:defRPr sz="2600" b="1">
+            <a:pPr algn="ctr">
+              <a:defRPr sz="1600" b="1">
+                <a:solidFill>
+                  <a:srgbClr val="D9D9D9"/>
+                </a:solidFill>
+                <a:latin typeface="Segoe UI"/>
+              </a:defRPr>
+            </a:pPr>
+            <a:r>
+              <a:t>&gt;</a:t>
+            </a:r>
+          </a:p>
+        </p:txBody>
+      </p:sp>
+      <p:sp>
+        <p:nvSpPr>
+          <p:cNvPr id="23" name="Rectangle 22"/>
+          <p:cNvSpPr/>
+          <p:nvPr/>
+        </p:nvSpPr>
+        <p:spPr>
+          <a:xfrm>
+            <a:off x="4480560" y="4142232"/>
+            <a:ext cx="1755648" cy="36576"/>
+          </a:xfrm>
+          <a:prstGeom prst="rect">
+            <a:avLst/>
+          </a:prstGeom>
+          <a:gradFill rotWithShape="1">
+            <a:gsLst>
+              <a:gs pos="0">
+                <a:srgbClr val="4EA0A6"/>
+              </a:gs>
+              <a:gs pos="100000">
+                <a:srgbClr val="5B9858"/>
+              </a:gs>
+            </a:gsLst>
+            <a:lin scaled="0"/>
+          </a:gradFill>
+          <a:ln>
+            <a:noFill/>
+          </a:ln>
+          <a:effectLst/>
+        </p:spPr>
+        <p:style>
+          <a:lnRef idx="1">
+            <a:schemeClr val="accent1"/>
+          </a:lnRef>
+          <a:fillRef idx="3">
+            <a:schemeClr val="accent1"/>
+          </a:fillRef>
+          <a:effectRef idx="2">
+            <a:schemeClr val="accent1"/>
+          </a:effectRef>
+          <a:fontRef idx="minor">
+            <a:schemeClr val="lt1"/>
+          </a:fontRef>
+        </p:style>
+        <p:txBody>
+          <a:bodyPr rtlCol="0" anchor="ctr"/>
+          <a:lstStyle/>
+          <a:p>
+            <a:pPr algn="ctr"/>
+          </a:p>
+        </p:txBody>
+      </p:sp>
+      <p:sp>
+        <p:nvSpPr>
+          <p:cNvPr id="24" name="TextBox 23"/>
+          <p:cNvSpPr txBox="1"/>
+          <p:nvPr/>
+        </p:nvSpPr>
+        <p:spPr>
+          <a:xfrm>
+            <a:off x="5166360" y="3995928"/>
+            <a:ext cx="365760" cy="365760"/>
+          </a:xfrm>
+          <a:prstGeom prst="rect">
+            <a:avLst/>
+          </a:prstGeom>
+          <a:noFill/>
+          <a:effectLst/>
+        </p:spPr>
+        <p:txBody>
+          <a:bodyPr wrap="square">
+            <a:spAutoFit/>
+          </a:bodyPr>
+          <a:lstStyle/>
+          <a:p>
+            <a:pPr algn="ctr">
+              <a:defRPr sz="1600" b="1">
+                <a:solidFill>
+                  <a:srgbClr val="D9D9D9"/>
+                </a:solidFill>
+                <a:latin typeface="Segoe UI"/>
+              </a:defRPr>
+            </a:pPr>
+            <a:r>
+              <a:t>&gt;</a:t>
+            </a:r>
+          </a:p>
+        </p:txBody>
+      </p:sp>
+      <p:sp>
+        <p:nvSpPr>
+          <p:cNvPr id="25" name="Rectangle 24"/>
+          <p:cNvSpPr/>
+          <p:nvPr/>
+        </p:nvSpPr>
+        <p:spPr>
+          <a:xfrm>
+            <a:off x="6217920" y="4142232"/>
+            <a:ext cx="1755648" cy="36576"/>
+          </a:xfrm>
+          <a:prstGeom prst="rect">
+            <a:avLst/>
+          </a:prstGeom>
+          <a:gradFill rotWithShape="1">
+            <a:gsLst>
+              <a:gs pos="0">
+                <a:srgbClr val="5B9858"/>
+              </a:gs>
+              <a:gs pos="100000">
+                <a:srgbClr val="D6A752"/>
+              </a:gs>
+            </a:gsLst>
+            <a:lin scaled="0"/>
+          </a:gradFill>
+          <a:ln>
+            <a:noFill/>
+          </a:ln>
+          <a:effectLst/>
+        </p:spPr>
+        <p:style>
+          <a:lnRef idx="1">
+            <a:schemeClr val="accent1"/>
+          </a:lnRef>
+          <a:fillRef idx="3">
+            <a:schemeClr val="accent1"/>
+          </a:fillRef>
+          <a:effectRef idx="2">
+            <a:schemeClr val="accent1"/>
+          </a:effectRef>
+          <a:fontRef idx="minor">
+            <a:schemeClr val="lt1"/>
+          </a:fontRef>
+        </p:style>
+        <p:txBody>
+          <a:bodyPr rtlCol="0" anchor="ctr"/>
+          <a:lstStyle/>
+          <a:p>
+            <a:pPr algn="ctr"/>
+          </a:p>
+        </p:txBody>
+      </p:sp>
+      <p:sp>
+        <p:nvSpPr>
+          <p:cNvPr id="26" name="TextBox 25"/>
+          <p:cNvSpPr txBox="1"/>
+          <p:nvPr/>
+        </p:nvSpPr>
+        <p:spPr>
+          <a:xfrm>
+            <a:off x="6903720" y="3995928"/>
+            <a:ext cx="365760" cy="365760"/>
+          </a:xfrm>
+          <a:prstGeom prst="rect">
+            <a:avLst/>
+          </a:prstGeom>
+          <a:noFill/>
+          <a:effectLst/>
+        </p:spPr>
+        <p:txBody>
+          <a:bodyPr wrap="square">
+            <a:spAutoFit/>
+          </a:bodyPr>
+          <a:lstStyle/>
+          <a:p>
+            <a:pPr algn="ctr">
+              <a:defRPr sz="1600" b="1">
+                <a:solidFill>
+                  <a:srgbClr val="D9D9D9"/>
+                </a:solidFill>
+                <a:latin typeface="Segoe UI"/>
+              </a:defRPr>
+            </a:pPr>
+            <a:r>
+              <a:t>&gt;</a:t>
+            </a:r>
+          </a:p>
+        </p:txBody>
+      </p:sp>
+      <p:sp>
+        <p:nvSpPr>
+          <p:cNvPr id="27" name="Rectangle 26"/>
+          <p:cNvSpPr/>
+          <p:nvPr/>
+        </p:nvSpPr>
+        <p:spPr>
+          <a:xfrm>
+            <a:off x="7955280" y="4142232"/>
+            <a:ext cx="1755648" cy="36576"/>
+          </a:xfrm>
+          <a:prstGeom prst="rect">
+            <a:avLst/>
+          </a:prstGeom>
+          <a:gradFill rotWithShape="1">
+            <a:gsLst>
+              <a:gs pos="0">
+                <a:srgbClr val="D6A752"/>
+              </a:gs>
+              <a:gs pos="100000">
+                <a:srgbClr val="478149"/>
+              </a:gs>
+            </a:gsLst>
+            <a:lin scaled="0"/>
+          </a:gradFill>
+          <a:ln>
+            <a:noFill/>
+          </a:ln>
+          <a:effectLst/>
+        </p:spPr>
+        <p:style>
+          <a:lnRef idx="1">
+            <a:schemeClr val="accent1"/>
+          </a:lnRef>
+          <a:fillRef idx="3">
+            <a:schemeClr val="accent1"/>
+          </a:fillRef>
+          <a:effectRef idx="2">
+            <a:schemeClr val="accent1"/>
+          </a:effectRef>
+          <a:fontRef idx="minor">
+            <a:schemeClr val="lt1"/>
+          </a:fontRef>
+        </p:style>
+        <p:txBody>
+          <a:bodyPr rtlCol="0" anchor="ctr"/>
+          <a:lstStyle/>
+          <a:p>
+            <a:pPr algn="ctr"/>
+          </a:p>
+        </p:txBody>
+      </p:sp>
+      <p:sp>
+        <p:nvSpPr>
+          <p:cNvPr id="28" name="TextBox 27"/>
+          <p:cNvSpPr txBox="1"/>
+          <p:nvPr/>
+        </p:nvSpPr>
+        <p:spPr>
+          <a:xfrm>
+            <a:off x="8641080" y="3995928"/>
+            <a:ext cx="365760" cy="365760"/>
+          </a:xfrm>
+          <a:prstGeom prst="rect">
+            <a:avLst/>
+          </a:prstGeom>
+          <a:noFill/>
+          <a:effectLst/>
+        </p:spPr>
+        <p:txBody>
+          <a:bodyPr wrap="square">
+            <a:spAutoFit/>
+          </a:bodyPr>
+          <a:lstStyle/>
+          <a:p>
+            <a:pPr algn="ctr">
+              <a:defRPr sz="1600" b="1">
+                <a:solidFill>
+                  <a:srgbClr val="D9D9D9"/>
+                </a:solidFill>
+                <a:latin typeface="Segoe UI"/>
+              </a:defRPr>
+            </a:pPr>
+            <a:r>
+              <a:t>&gt;</a:t>
+            </a:r>
+          </a:p>
+        </p:txBody>
+      </p:sp>
+      <p:sp>
+        <p:nvSpPr>
+          <p:cNvPr id="29" name="Rectangle 28"/>
+          <p:cNvSpPr/>
+          <p:nvPr/>
+        </p:nvSpPr>
+        <p:spPr>
+          <a:xfrm>
+            <a:off x="9692640" y="4142232"/>
+            <a:ext cx="1371600" cy="36576"/>
+          </a:xfrm>
+          <a:prstGeom prst="rect">
+            <a:avLst/>
+          </a:prstGeom>
+          <a:gradFill rotWithShape="1">
+            <a:gsLst>
+              <a:gs pos="0">
+                <a:srgbClr val="478149"/>
+              </a:gs>
+              <a:gs pos="100000">
+                <a:srgbClr val="D9D9D9"/>
+              </a:gs>
+            </a:gsLst>
+            <a:lin scaled="0"/>
+          </a:gradFill>
+          <a:ln>
+            <a:noFill/>
+          </a:ln>
+          <a:effectLst/>
+        </p:spPr>
+        <p:style>
+          <a:lnRef idx="1">
+            <a:schemeClr val="accent1"/>
+          </a:lnRef>
+          <a:fillRef idx="3">
+            <a:schemeClr val="accent1"/>
+          </a:fillRef>
+          <a:effectRef idx="2">
+            <a:schemeClr val="accent1"/>
+          </a:effectRef>
+          <a:fontRef idx="minor">
+            <a:schemeClr val="lt1"/>
+          </a:fontRef>
+        </p:style>
+        <p:txBody>
+          <a:bodyPr rtlCol="0" anchor="ctr"/>
+          <a:lstStyle/>
+          <a:p>
+            <a:pPr algn="ctr"/>
+          </a:p>
+        </p:txBody>
+      </p:sp>
+      <p:sp>
+        <p:nvSpPr>
+          <p:cNvPr id="30" name="TextBox 29"/>
+          <p:cNvSpPr txBox="1"/>
+          <p:nvPr/>
+        </p:nvSpPr>
+        <p:spPr>
+          <a:xfrm>
+            <a:off x="10881360" y="3995928"/>
+            <a:ext cx="365760" cy="365760"/>
+          </a:xfrm>
+          <a:prstGeom prst="rect">
+            <a:avLst/>
+          </a:prstGeom>
+          <a:noFill/>
+          <a:effectLst/>
+        </p:spPr>
+        <p:txBody>
+          <a:bodyPr wrap="square">
+            <a:spAutoFit/>
+          </a:bodyPr>
+          <a:lstStyle/>
+          <a:p>
+            <a:pPr algn="ctr">
+              <a:defRPr sz="1400" b="0">
+                <a:solidFill>
+                  <a:srgbClr val="D9D9D9"/>
+                </a:solidFill>
+                <a:latin typeface="Segoe UI"/>
+              </a:defRPr>
+            </a:pPr>
+            <a:r>
+              <a:t>▶</a:t>
+            </a:r>
+          </a:p>
+        </p:txBody>
+      </p:sp>
+      <p:sp>
+        <p:nvSpPr>
+          <p:cNvPr id="31" name="Oval 30"/>
+          <p:cNvSpPr/>
+          <p:nvPr/>
+        </p:nvSpPr>
+        <p:spPr>
+          <a:xfrm>
+            <a:off x="2633472" y="4050792"/>
+            <a:ext cx="219456" cy="219456"/>
+          </a:xfrm>
+          <a:prstGeom prst="ellipse">
+            <a:avLst/>
+          </a:prstGeom>
+          <a:noFill/>
+          <a:ln w="19050">
+            <a:solidFill>
+              <a:srgbClr val="39699A"/>
+            </a:solidFill>
+          </a:ln>
+          <a:effectLst/>
+        </p:spPr>
+        <p:style>
+          <a:lnRef idx="1">
+            <a:schemeClr val="accent1"/>
+          </a:lnRef>
+          <a:fillRef idx="3">
+            <a:schemeClr val="accent1"/>
+          </a:fillRef>
+          <a:effectRef idx="2">
+            <a:schemeClr val="accent1"/>
+          </a:effectRef>
+          <a:fontRef idx="minor">
+            <a:schemeClr val="lt1"/>
+          </a:fontRef>
+        </p:style>
+        <p:txBody>
+          <a:bodyPr rtlCol="0" anchor="ctr"/>
+          <a:lstStyle/>
+          <a:p>
+            <a:pPr algn="ctr"/>
+          </a:p>
+        </p:txBody>
+      </p:sp>
+      <p:sp>
+        <p:nvSpPr>
+          <p:cNvPr id="32" name="Oval 31"/>
+          <p:cNvSpPr/>
+          <p:nvPr/>
+        </p:nvSpPr>
+        <p:spPr>
+          <a:xfrm>
+            <a:off x="2688336" y="4105656"/>
+            <a:ext cx="109728" cy="109728"/>
+          </a:xfrm>
+          <a:prstGeom prst="ellipse">
+            <a:avLst/>
+          </a:prstGeom>
+          <a:solidFill>
+            <a:srgbClr val="39699A"/>
+          </a:solidFill>
+          <a:ln>
+            <a:noFill/>
+          </a:ln>
+          <a:effectLst/>
+        </p:spPr>
+        <p:style>
+          <a:lnRef idx="1">
+            <a:schemeClr val="accent1"/>
+          </a:lnRef>
+          <a:fillRef idx="3">
+            <a:schemeClr val="accent1"/>
+          </a:fillRef>
+          <a:effectRef idx="2">
+            <a:schemeClr val="accent1"/>
+          </a:effectRef>
+          <a:fontRef idx="minor">
+            <a:schemeClr val="lt1"/>
+          </a:fontRef>
+        </p:style>
+        <p:txBody>
+          <a:bodyPr rtlCol="0" anchor="ctr"/>
+          <a:lstStyle/>
+          <a:p>
+            <a:pPr algn="ctr"/>
+          </a:p>
+        </p:txBody>
+      </p:sp>
+      <p:sp>
+        <p:nvSpPr>
+          <p:cNvPr id="33" name="TextBox 32"/>
+          <p:cNvSpPr txBox="1"/>
+          <p:nvPr/>
+        </p:nvSpPr>
+        <p:spPr>
+          <a:xfrm>
+            <a:off x="2468880" y="4297680"/>
+            <a:ext cx="548640" cy="274320"/>
+          </a:xfrm>
+          <a:prstGeom prst="rect">
+            <a:avLst/>
+          </a:prstGeom>
+          <a:noFill/>
+          <a:effectLst/>
+        </p:spPr>
+        <p:txBody>
+          <a:bodyPr wrap="square">
+            <a:spAutoFit/>
+          </a:bodyPr>
+          <a:lstStyle/>
+          <a:p>
+            <a:pPr algn="ctr">
+              <a:defRPr sz="1100" b="1">
+                <a:solidFill>
+                  <a:srgbClr val="39699A"/>
+                </a:solidFill>
+                <a:latin typeface="Segoe UI Semibold"/>
+              </a:defRPr>
+            </a:pPr>
+            <a:r>
+              <a:t>Jan</a:t>
+            </a:r>
+          </a:p>
+        </p:txBody>
+      </p:sp>
+      <p:sp>
+        <p:nvSpPr>
+          <p:cNvPr id="34" name="Oval 33"/>
+          <p:cNvSpPr/>
+          <p:nvPr/>
+        </p:nvSpPr>
+        <p:spPr>
+          <a:xfrm>
+            <a:off x="2729484" y="3931920"/>
+            <a:ext cx="27432" cy="27432"/>
+          </a:xfrm>
+          <a:prstGeom prst="ellipse">
+            <a:avLst/>
+          </a:prstGeom>
+          <a:solidFill>
+            <a:srgbClr val="39699A"/>
+          </a:solidFill>
+          <a:ln>
+            <a:noFill/>
+          </a:ln>
+          <a:effectLst/>
+        </p:spPr>
+        <p:style>
+          <a:lnRef idx="1">
+            <a:schemeClr val="accent1"/>
+          </a:lnRef>
+          <a:fillRef idx="3">
+            <a:schemeClr val="accent1"/>
+          </a:fillRef>
+          <a:effectRef idx="2">
+            <a:schemeClr val="accent1"/>
+          </a:effectRef>
+          <a:fontRef idx="minor">
+            <a:schemeClr val="lt1"/>
+          </a:fontRef>
+        </p:style>
+        <p:txBody>
+          <a:bodyPr rtlCol="0" anchor="ctr"/>
+          <a:lstStyle/>
+          <a:p>
+            <a:pPr algn="ctr"/>
+          </a:p>
+        </p:txBody>
+      </p:sp>
+      <p:sp>
+        <p:nvSpPr>
+          <p:cNvPr id="35" name="Oval 34"/>
+          <p:cNvSpPr/>
+          <p:nvPr/>
+        </p:nvSpPr>
+        <p:spPr>
+          <a:xfrm>
+            <a:off x="2729484" y="3749040"/>
+            <a:ext cx="27432" cy="27432"/>
+          </a:xfrm>
+          <a:prstGeom prst="ellipse">
+            <a:avLst/>
+          </a:prstGeom>
+          <a:solidFill>
+            <a:srgbClr val="39699A"/>
+          </a:solidFill>
+          <a:ln>
+            <a:noFill/>
+          </a:ln>
+          <a:effectLst/>
+        </p:spPr>
+        <p:style>
+          <a:lnRef idx="1">
+            <a:schemeClr val="accent1"/>
+          </a:lnRef>
+          <a:fillRef idx="3">
+            <a:schemeClr val="accent1"/>
+          </a:fillRef>
+          <a:effectRef idx="2">
+            <a:schemeClr val="accent1"/>
+          </a:effectRef>
+          <a:fontRef idx="minor">
+            <a:schemeClr val="lt1"/>
+          </a:fontRef>
+        </p:style>
+        <p:txBody>
+          <a:bodyPr rtlCol="0" anchor="ctr"/>
+          <a:lstStyle/>
+          <a:p>
+            <a:pPr algn="ctr"/>
+          </a:p>
+        </p:txBody>
+      </p:sp>
+      <p:sp>
+        <p:nvSpPr>
+          <p:cNvPr id="36" name="Oval 35"/>
+          <p:cNvSpPr/>
+          <p:nvPr/>
+        </p:nvSpPr>
+        <p:spPr>
+          <a:xfrm>
+            <a:off x="2729484" y="3566160"/>
+            <a:ext cx="27432" cy="27432"/>
+          </a:xfrm>
+          <a:prstGeom prst="ellipse">
+            <a:avLst/>
+          </a:prstGeom>
+          <a:solidFill>
+            <a:srgbClr val="39699A"/>
+          </a:solidFill>
+          <a:ln>
+            <a:noFill/>
+          </a:ln>
+          <a:effectLst/>
+        </p:spPr>
+        <p:style>
+          <a:lnRef idx="1">
+            <a:schemeClr val="accent1"/>
+          </a:lnRef>
+          <a:fillRef idx="3">
+            <a:schemeClr val="accent1"/>
+          </a:fillRef>
+          <a:effectRef idx="2">
+            <a:schemeClr val="accent1"/>
+          </a:effectRef>
+          <a:fontRef idx="minor">
+            <a:schemeClr val="lt1"/>
+          </a:fontRef>
+        </p:style>
+        <p:txBody>
+          <a:bodyPr rtlCol="0" anchor="ctr"/>
+          <a:lstStyle/>
+          <a:p>
+            <a:pPr algn="ctr"/>
+          </a:p>
+        </p:txBody>
+      </p:sp>
+      <p:sp>
+        <p:nvSpPr>
+          <p:cNvPr id="37" name="Oval 36"/>
+          <p:cNvSpPr/>
+          <p:nvPr/>
+        </p:nvSpPr>
+        <p:spPr>
+          <a:xfrm>
+            <a:off x="2729484" y="3383280"/>
+            <a:ext cx="27432" cy="27432"/>
+          </a:xfrm>
+          <a:prstGeom prst="ellipse">
+            <a:avLst/>
+          </a:prstGeom>
+          <a:solidFill>
+            <a:srgbClr val="39699A"/>
+          </a:solidFill>
+          <a:ln>
+            <a:noFill/>
+          </a:ln>
+          <a:effectLst/>
+        </p:spPr>
+        <p:style>
+          <a:lnRef idx="1">
+            <a:schemeClr val="accent1"/>
+          </a:lnRef>
+          <a:fillRef idx="3">
+            <a:schemeClr val="accent1"/>
+          </a:fillRef>
+          <a:effectRef idx="2">
+            <a:schemeClr val="accent1"/>
+          </a:effectRef>
+          <a:fontRef idx="minor">
+            <a:schemeClr val="lt1"/>
+          </a:fontRef>
+        </p:style>
+        <p:txBody>
+          <a:bodyPr rtlCol="0" anchor="ctr"/>
+          <a:lstStyle/>
+          <a:p>
+            <a:pPr algn="ctr"/>
+          </a:p>
+        </p:txBody>
+      </p:sp>
+      <p:sp>
+        <p:nvSpPr>
+          <p:cNvPr id="38" name="Oval 37"/>
+          <p:cNvSpPr/>
+          <p:nvPr/>
+        </p:nvSpPr>
+        <p:spPr>
+          <a:xfrm>
+            <a:off x="2729484" y="3200400"/>
+            <a:ext cx="27432" cy="27432"/>
+          </a:xfrm>
+          <a:prstGeom prst="ellipse">
+            <a:avLst/>
+          </a:prstGeom>
+          <a:solidFill>
+            <a:srgbClr val="39699A"/>
+          </a:solidFill>
+          <a:ln>
+            <a:noFill/>
+          </a:ln>
+          <a:effectLst/>
+        </p:spPr>
+        <p:style>
+          <a:lnRef idx="1">
+            <a:schemeClr val="accent1"/>
+          </a:lnRef>
+          <a:fillRef idx="3">
+            <a:schemeClr val="accent1"/>
+          </a:fillRef>
+          <a:effectRef idx="2">
+            <a:schemeClr val="accent1"/>
+          </a:effectRef>
+          <a:fontRef idx="minor">
+            <a:schemeClr val="lt1"/>
+          </a:fontRef>
+        </p:style>
+        <p:txBody>
+          <a:bodyPr rtlCol="0" anchor="ctr"/>
+          <a:lstStyle/>
+          <a:p>
+            <a:pPr algn="ctr"/>
+          </a:p>
+        </p:txBody>
+      </p:sp>
+      <p:sp>
+        <p:nvSpPr>
+          <p:cNvPr id="39" name="Oval 38"/>
+          <p:cNvSpPr/>
+          <p:nvPr/>
+        </p:nvSpPr>
+        <p:spPr>
+          <a:xfrm>
+            <a:off x="2729484" y="3017520"/>
+            <a:ext cx="27432" cy="27432"/>
+          </a:xfrm>
+          <a:prstGeom prst="ellipse">
+            <a:avLst/>
+          </a:prstGeom>
+          <a:solidFill>
+            <a:srgbClr val="39699A"/>
+          </a:solidFill>
+          <a:ln>
+            <a:noFill/>
+          </a:ln>
+          <a:effectLst/>
+        </p:spPr>
+        <p:style>
+          <a:lnRef idx="1">
+            <a:schemeClr val="accent1"/>
+          </a:lnRef>
+          <a:fillRef idx="3">
+            <a:schemeClr val="accent1"/>
+          </a:fillRef>
+          <a:effectRef idx="2">
+            <a:schemeClr val="accent1"/>
+          </a:effectRef>
+          <a:fontRef idx="minor">
+            <a:schemeClr val="lt1"/>
+          </a:fontRef>
+        </p:style>
+        <p:txBody>
+          <a:bodyPr rtlCol="0" anchor="ctr"/>
+          <a:lstStyle/>
+          <a:p>
+            <a:pPr algn="ctr"/>
+          </a:p>
+        </p:txBody>
+      </p:sp>
+      <p:sp>
+        <p:nvSpPr>
+          <p:cNvPr id="40" name="Oval 39"/>
+          <p:cNvSpPr/>
+          <p:nvPr/>
+        </p:nvSpPr>
+        <p:spPr>
+          <a:xfrm>
+            <a:off x="2423160" y="2103120"/>
+            <a:ext cx="640080" cy="640080"/>
+          </a:xfrm>
+          <a:prstGeom prst="ellipse">
+            <a:avLst/>
+          </a:prstGeom>
+          <a:solidFill>
+            <a:srgbClr val="E1E8EF"/>
+          </a:solidFill>
+          <a:ln>
+            <a:noFill/>
+          </a:ln>
+          <a:effectLst/>
+        </p:spPr>
+        <p:style>
+          <a:lnRef idx="1">
+            <a:schemeClr val="accent1"/>
+          </a:lnRef>
+          <a:fillRef idx="3">
+            <a:schemeClr val="accent1"/>
+          </a:fillRef>
+          <a:effectRef idx="2">
+            <a:schemeClr val="accent1"/>
+          </a:effectRef>
+          <a:fontRef idx="minor">
+            <a:schemeClr val="lt1"/>
+          </a:fontRef>
+        </p:style>
+        <p:txBody>
+          <a:bodyPr rtlCol="0" anchor="ctr"/>
+          <a:lstStyle/>
+          <a:p>
+            <a:pPr algn="ctr"/>
+          </a:p>
+        </p:txBody>
+      </p:sp>
+      <p:pic>
+        <p:nvPicPr>
+          <p:cNvPr id="41" name="Picture 40" descr="time_lightbulb.png"/>
+          <p:cNvPicPr>
+            <a:picLocks noChangeAspect="1"/>
+          </p:cNvPicPr>
+          <p:nvPr/>
+        </p:nvPicPr>
+        <p:blipFill>
+          <a:blip r:embed="rId3"/>
+          <a:stretch>
+            <a:fillRect/>
+          </a:stretch>
+        </p:blipFill>
+        <p:spPr>
+          <a:xfrm>
+            <a:off x="2560320" y="2240280"/>
+            <a:ext cx="365760" cy="365760"/>
+          </a:xfrm>
+          <a:prstGeom prst="rect">
+            <a:avLst/>
+          </a:prstGeom>
+        </p:spPr>
+      </p:pic>
+      <p:sp>
+        <p:nvSpPr>
+          <p:cNvPr id="42" name="Arc 41"/>
+          <p:cNvSpPr/>
+          <p:nvPr/>
+        </p:nvSpPr>
+        <p:spPr>
+          <a:xfrm>
+            <a:off x="2331720" y="2011680"/>
+            <a:ext cx="822960" cy="822960"/>
+          </a:xfrm>
+          <a:prstGeom prst="arc">
+            <a:avLst>
+              <a:gd name="adj1" fmla="val 9000000"/>
+              <a:gd name="adj2" fmla="val 27000000"/>
+            </a:avLst>
+          </a:prstGeom>
+          <a:ln w="19050">
+            <a:solidFill>
+              <a:srgbClr val="39699A"/>
+            </a:solidFill>
+          </a:ln>
+          <a:effectLst/>
+          <a:noFill/>
+        </p:spPr>
+        <p:style>
+          <a:lnRef idx="1">
+            <a:schemeClr val="accent1"/>
+          </a:lnRef>
+          <a:fillRef idx="3">
+            <a:schemeClr val="accent1"/>
+          </a:fillRef>
+          <a:effectRef idx="2">
+            <a:schemeClr val="accent1"/>
+          </a:effectRef>
+          <a:fontRef idx="minor">
+            <a:schemeClr val="lt1"/>
+          </a:fontRef>
+        </p:style>
+        <p:txBody>
+          <a:bodyPr rtlCol="0" anchor="ctr"/>
+          <a:lstStyle/>
+          <a:p>
+            <a:pPr algn="ctr"/>
+          </a:p>
+        </p:txBody>
+      </p:sp>
+      <p:sp>
+        <p:nvSpPr>
+          <p:cNvPr id="43" name="Oval 42"/>
+          <p:cNvSpPr/>
+          <p:nvPr/>
+        </p:nvSpPr>
+        <p:spPr>
+          <a:xfrm>
+            <a:off x="2711196" y="2802636"/>
+            <a:ext cx="64008" cy="64008"/>
+          </a:xfrm>
+          <a:prstGeom prst="ellipse">
+            <a:avLst/>
+          </a:prstGeom>
+          <a:solidFill>
+            <a:srgbClr val="39699A"/>
+          </a:solidFill>
+          <a:ln>
+            <a:noFill/>
+          </a:ln>
+          <a:effectLst/>
+        </p:spPr>
+        <p:style>
+          <a:lnRef idx="1">
+            <a:schemeClr val="accent1"/>
+          </a:lnRef>
+          <a:fillRef idx="3">
+            <a:schemeClr val="accent1"/>
+          </a:fillRef>
+          <a:effectRef idx="2">
+            <a:schemeClr val="accent1"/>
+          </a:effectRef>
+          <a:fontRef idx="minor">
+            <a:schemeClr val="lt1"/>
+          </a:fontRef>
+        </p:style>
+        <p:txBody>
+          <a:bodyPr rtlCol="0" anchor="ctr"/>
+          <a:lstStyle/>
+          <a:p>
+            <a:pPr algn="ctr"/>
+          </a:p>
+        </p:txBody>
+      </p:sp>
+      <p:sp>
+        <p:nvSpPr>
+          <p:cNvPr id="44" name="TextBox 43"/>
+          <p:cNvSpPr txBox="1"/>
+          <p:nvPr/>
+        </p:nvSpPr>
+        <p:spPr>
+          <a:xfrm>
+            <a:off x="3200400" y="2103120"/>
+            <a:ext cx="1097280" cy="731520"/>
+          </a:xfrm>
+          <a:prstGeom prst="rect">
+            <a:avLst/>
+          </a:prstGeom>
+          <a:noFill/>
+          <a:effectLst/>
+        </p:spPr>
+        <p:txBody>
+          <a:bodyPr wrap="square">
+            <a:spAutoFit/>
+          </a:bodyPr>
+          <a:lstStyle/>
+          <a:p>
+            <a:pPr>
+              <a:lnSpc>
+                <a:spcPct val="100000"/>
+              </a:lnSpc>
+              <a:defRPr sz="1000" b="1">
                 <a:solidFill>
                   <a:srgbClr val="222222"/>
                 </a:solidFill>
@@ -3722,27 +5358,75 @@
               </a:defRPr>
             </a:pPr>
             <a:r>
-              <a:t>Theme: Focus, Prioritize, Deliver</a:t>
-            </a:r>
-          </a:p>
-        </p:txBody>
-      </p:sp>
-      <p:sp>
-        <p:nvSpPr>
-          <p:cNvPr id="7" name="Rectangle 6"/>
-          <p:cNvSpPr/>
-          <p:nvPr/>
-        </p:nvSpPr>
-        <p:spPr>
-          <a:xfrm>
-            <a:off x="0" y="1133856"/>
-            <a:ext cx="12191695" cy="18288"/>
-          </a:xfrm>
-          <a:prstGeom prst="rect">
-            <a:avLst/>
-          </a:prstGeom>
-          <a:solidFill>
-            <a:srgbClr val="C8A000"/>
+              <a:t>Clarity</a:t>
+            </a:r>
+            <a:br/>
+            <a:r>
+              <a:t>First</a:t>
+            </a:r>
+          </a:p>
+        </p:txBody>
+      </p:sp>
+      <p:sp>
+        <p:nvSpPr>
+          <p:cNvPr id="45" name="Oval 44"/>
+          <p:cNvSpPr/>
+          <p:nvPr/>
+        </p:nvSpPr>
+        <p:spPr>
+          <a:xfrm>
+            <a:off x="4370832" y="4050792"/>
+            <a:ext cx="219456" cy="219456"/>
+          </a:xfrm>
+          <a:prstGeom prst="ellipse">
+            <a:avLst/>
+          </a:prstGeom>
+          <a:noFill/>
+          <a:ln w="19050">
+            <a:solidFill>
+              <a:srgbClr val="4EA0A6"/>
+            </a:solidFill>
+          </a:ln>
+          <a:effectLst/>
+        </p:spPr>
+        <p:style>
+          <a:lnRef idx="1">
+            <a:schemeClr val="accent1"/>
+          </a:lnRef>
+          <a:fillRef idx="3">
+            <a:schemeClr val="accent1"/>
+          </a:fillRef>
+          <a:effectRef idx="2">
+            <a:schemeClr val="accent1"/>
+          </a:effectRef>
+          <a:fontRef idx="minor">
+            <a:schemeClr val="lt1"/>
+          </a:fontRef>
+        </p:style>
+        <p:txBody>
+          <a:bodyPr rtlCol="0" anchor="ctr"/>
+          <a:lstStyle/>
+          <a:p>
+            <a:pPr algn="ctr"/>
+          </a:p>
+        </p:txBody>
+      </p:sp>
+      <p:sp>
+        <p:nvSpPr>
+          <p:cNvPr id="46" name="Oval 45"/>
+          <p:cNvSpPr/>
+          <p:nvPr/>
+        </p:nvSpPr>
+        <p:spPr>
+          <a:xfrm>
+            <a:off x="4425696" y="4105656"/>
+            <a:ext cx="109728" cy="109728"/>
+          </a:xfrm>
+          <a:prstGeom prst="ellipse">
+            <a:avLst/>
+          </a:prstGeom>
+          <a:solidFill>
+            <a:srgbClr val="4EA0A6"/>
           </a:solidFill>
           <a:ln>
             <a:noFill/>
@@ -3773,14 +5457,14 @@
       </p:sp>
       <p:sp>
         <p:nvSpPr>
-          <p:cNvPr id="8" name="TextBox 7"/>
+          <p:cNvPr id="47" name="TextBox 46"/>
           <p:cNvSpPr txBox="1"/>
           <p:nvPr/>
         </p:nvSpPr>
         <p:spPr>
           <a:xfrm>
-            <a:off x="9601200" y="777240"/>
-            <a:ext cx="2286000" cy="274320"/>
+            <a:off x="4206240" y="4297680"/>
+            <a:ext cx="548640" cy="274320"/>
           </a:xfrm>
           <a:prstGeom prst="rect">
             <a:avLst/>
@@ -3794,35 +5478,459 @@
           </a:bodyPr>
           <a:lstStyle/>
           <a:p>
-            <a:pPr algn="r">
-              <a:defRPr sz="800" b="1">
+            <a:pPr algn="ctr">
+              <a:defRPr sz="1100" b="1">
                 <a:solidFill>
-                  <a:srgbClr val="888888"/>
+                  <a:srgbClr val="4EA0A6"/>
                 </a:solidFill>
                 <a:latin typeface="Segoe UI Semibold"/>
               </a:defRPr>
             </a:pPr>
             <a:r>
-              <a:t>INTERNAL</a:t>
-            </a:r>
-          </a:p>
-        </p:txBody>
-      </p:sp>
-      <p:sp>
-        <p:nvSpPr>
-          <p:cNvPr id="9" name="TextBox 8"/>
+              <a:t>Feb</a:t>
+            </a:r>
+          </a:p>
+        </p:txBody>
+      </p:sp>
+      <p:sp>
+        <p:nvSpPr>
+          <p:cNvPr id="48" name="Oval 47"/>
+          <p:cNvSpPr/>
+          <p:nvPr/>
+        </p:nvSpPr>
+        <p:spPr>
+          <a:xfrm>
+            <a:off x="4466844" y="3931920"/>
+            <a:ext cx="27432" cy="27432"/>
+          </a:xfrm>
+          <a:prstGeom prst="ellipse">
+            <a:avLst/>
+          </a:prstGeom>
+          <a:solidFill>
+            <a:srgbClr val="4EA0A6"/>
+          </a:solidFill>
+          <a:ln>
+            <a:noFill/>
+          </a:ln>
+          <a:effectLst/>
+        </p:spPr>
+        <p:style>
+          <a:lnRef idx="1">
+            <a:schemeClr val="accent1"/>
+          </a:lnRef>
+          <a:fillRef idx="3">
+            <a:schemeClr val="accent1"/>
+          </a:fillRef>
+          <a:effectRef idx="2">
+            <a:schemeClr val="accent1"/>
+          </a:effectRef>
+          <a:fontRef idx="minor">
+            <a:schemeClr val="lt1"/>
+          </a:fontRef>
+        </p:style>
+        <p:txBody>
+          <a:bodyPr rtlCol="0" anchor="ctr"/>
+          <a:lstStyle/>
+          <a:p>
+            <a:pPr algn="ctr"/>
+          </a:p>
+        </p:txBody>
+      </p:sp>
+      <p:sp>
+        <p:nvSpPr>
+          <p:cNvPr id="49" name="Oval 48"/>
+          <p:cNvSpPr/>
+          <p:nvPr/>
+        </p:nvSpPr>
+        <p:spPr>
+          <a:xfrm>
+            <a:off x="4466844" y="3749040"/>
+            <a:ext cx="27432" cy="27432"/>
+          </a:xfrm>
+          <a:prstGeom prst="ellipse">
+            <a:avLst/>
+          </a:prstGeom>
+          <a:solidFill>
+            <a:srgbClr val="4EA0A6"/>
+          </a:solidFill>
+          <a:ln>
+            <a:noFill/>
+          </a:ln>
+          <a:effectLst/>
+        </p:spPr>
+        <p:style>
+          <a:lnRef idx="1">
+            <a:schemeClr val="accent1"/>
+          </a:lnRef>
+          <a:fillRef idx="3">
+            <a:schemeClr val="accent1"/>
+          </a:fillRef>
+          <a:effectRef idx="2">
+            <a:schemeClr val="accent1"/>
+          </a:effectRef>
+          <a:fontRef idx="minor">
+            <a:schemeClr val="lt1"/>
+          </a:fontRef>
+        </p:style>
+        <p:txBody>
+          <a:bodyPr rtlCol="0" anchor="ctr"/>
+          <a:lstStyle/>
+          <a:p>
+            <a:pPr algn="ctr"/>
+          </a:p>
+        </p:txBody>
+      </p:sp>
+      <p:sp>
+        <p:nvSpPr>
+          <p:cNvPr id="50" name="Oval 49"/>
+          <p:cNvSpPr/>
+          <p:nvPr/>
+        </p:nvSpPr>
+        <p:spPr>
+          <a:xfrm>
+            <a:off x="4466844" y="3566160"/>
+            <a:ext cx="27432" cy="27432"/>
+          </a:xfrm>
+          <a:prstGeom prst="ellipse">
+            <a:avLst/>
+          </a:prstGeom>
+          <a:solidFill>
+            <a:srgbClr val="4EA0A6"/>
+          </a:solidFill>
+          <a:ln>
+            <a:noFill/>
+          </a:ln>
+          <a:effectLst/>
+        </p:spPr>
+        <p:style>
+          <a:lnRef idx="1">
+            <a:schemeClr val="accent1"/>
+          </a:lnRef>
+          <a:fillRef idx="3">
+            <a:schemeClr val="accent1"/>
+          </a:fillRef>
+          <a:effectRef idx="2">
+            <a:schemeClr val="accent1"/>
+          </a:effectRef>
+          <a:fontRef idx="minor">
+            <a:schemeClr val="lt1"/>
+          </a:fontRef>
+        </p:style>
+        <p:txBody>
+          <a:bodyPr rtlCol="0" anchor="ctr"/>
+          <a:lstStyle/>
+          <a:p>
+            <a:pPr algn="ctr"/>
+          </a:p>
+        </p:txBody>
+      </p:sp>
+      <p:sp>
+        <p:nvSpPr>
+          <p:cNvPr id="51" name="Oval 50"/>
+          <p:cNvSpPr/>
+          <p:nvPr/>
+        </p:nvSpPr>
+        <p:spPr>
+          <a:xfrm>
+            <a:off x="4466844" y="3383280"/>
+            <a:ext cx="27432" cy="27432"/>
+          </a:xfrm>
+          <a:prstGeom prst="ellipse">
+            <a:avLst/>
+          </a:prstGeom>
+          <a:solidFill>
+            <a:srgbClr val="4EA0A6"/>
+          </a:solidFill>
+          <a:ln>
+            <a:noFill/>
+          </a:ln>
+          <a:effectLst/>
+        </p:spPr>
+        <p:style>
+          <a:lnRef idx="1">
+            <a:schemeClr val="accent1"/>
+          </a:lnRef>
+          <a:fillRef idx="3">
+            <a:schemeClr val="accent1"/>
+          </a:fillRef>
+          <a:effectRef idx="2">
+            <a:schemeClr val="accent1"/>
+          </a:effectRef>
+          <a:fontRef idx="minor">
+            <a:schemeClr val="lt1"/>
+          </a:fontRef>
+        </p:style>
+        <p:txBody>
+          <a:bodyPr rtlCol="0" anchor="ctr"/>
+          <a:lstStyle/>
+          <a:p>
+            <a:pPr algn="ctr"/>
+          </a:p>
+        </p:txBody>
+      </p:sp>
+      <p:sp>
+        <p:nvSpPr>
+          <p:cNvPr id="52" name="Oval 51"/>
+          <p:cNvSpPr/>
+          <p:nvPr/>
+        </p:nvSpPr>
+        <p:spPr>
+          <a:xfrm>
+            <a:off x="4466844" y="3200400"/>
+            <a:ext cx="27432" cy="27432"/>
+          </a:xfrm>
+          <a:prstGeom prst="ellipse">
+            <a:avLst/>
+          </a:prstGeom>
+          <a:solidFill>
+            <a:srgbClr val="4EA0A6"/>
+          </a:solidFill>
+          <a:ln>
+            <a:noFill/>
+          </a:ln>
+          <a:effectLst/>
+        </p:spPr>
+        <p:style>
+          <a:lnRef idx="1">
+            <a:schemeClr val="accent1"/>
+          </a:lnRef>
+          <a:fillRef idx="3">
+            <a:schemeClr val="accent1"/>
+          </a:fillRef>
+          <a:effectRef idx="2">
+            <a:schemeClr val="accent1"/>
+          </a:effectRef>
+          <a:fontRef idx="minor">
+            <a:schemeClr val="lt1"/>
+          </a:fontRef>
+        </p:style>
+        <p:txBody>
+          <a:bodyPr rtlCol="0" anchor="ctr"/>
+          <a:lstStyle/>
+          <a:p>
+            <a:pPr algn="ctr"/>
+          </a:p>
+        </p:txBody>
+      </p:sp>
+      <p:sp>
+        <p:nvSpPr>
+          <p:cNvPr id="53" name="Oval 52"/>
+          <p:cNvSpPr/>
+          <p:nvPr/>
+        </p:nvSpPr>
+        <p:spPr>
+          <a:xfrm>
+            <a:off x="4466844" y="3017520"/>
+            <a:ext cx="27432" cy="27432"/>
+          </a:xfrm>
+          <a:prstGeom prst="ellipse">
+            <a:avLst/>
+          </a:prstGeom>
+          <a:solidFill>
+            <a:srgbClr val="4EA0A6"/>
+          </a:solidFill>
+          <a:ln>
+            <a:noFill/>
+          </a:ln>
+          <a:effectLst/>
+        </p:spPr>
+        <p:style>
+          <a:lnRef idx="1">
+            <a:schemeClr val="accent1"/>
+          </a:lnRef>
+          <a:fillRef idx="3">
+            <a:schemeClr val="accent1"/>
+          </a:fillRef>
+          <a:effectRef idx="2">
+            <a:schemeClr val="accent1"/>
+          </a:effectRef>
+          <a:fontRef idx="minor">
+            <a:schemeClr val="lt1"/>
+          </a:fontRef>
+        </p:style>
+        <p:txBody>
+          <a:bodyPr rtlCol="0" anchor="ctr"/>
+          <a:lstStyle/>
+          <a:p>
+            <a:pPr algn="ctr"/>
+          </a:p>
+        </p:txBody>
+      </p:sp>
+      <p:sp>
+        <p:nvSpPr>
+          <p:cNvPr id="54" name="Oval 53"/>
+          <p:cNvSpPr/>
+          <p:nvPr/>
+        </p:nvSpPr>
+        <p:spPr>
+          <a:xfrm>
+            <a:off x="4160520" y="2103120"/>
+            <a:ext cx="640080" cy="640080"/>
+          </a:xfrm>
+          <a:prstGeom prst="ellipse">
+            <a:avLst/>
+          </a:prstGeom>
+          <a:solidFill>
+            <a:srgbClr val="E4F0F1"/>
+          </a:solidFill>
+          <a:ln>
+            <a:noFill/>
+          </a:ln>
+          <a:effectLst/>
+        </p:spPr>
+        <p:style>
+          <a:lnRef idx="1">
+            <a:schemeClr val="accent1"/>
+          </a:lnRef>
+          <a:fillRef idx="3">
+            <a:schemeClr val="accent1"/>
+          </a:fillRef>
+          <a:effectRef idx="2">
+            <a:schemeClr val="accent1"/>
+          </a:effectRef>
+          <a:fontRef idx="minor">
+            <a:schemeClr val="lt1"/>
+          </a:fontRef>
+        </p:style>
+        <p:txBody>
+          <a:bodyPr rtlCol="0" anchor="ctr"/>
+          <a:lstStyle/>
+          <a:p>
+            <a:pPr algn="ctr"/>
+          </a:p>
+        </p:txBody>
+      </p:sp>
+      <p:pic>
+        <p:nvPicPr>
+          <p:cNvPr id="55" name="Picture 54" descr="time_target.png"/>
+          <p:cNvPicPr>
+            <a:picLocks noChangeAspect="1"/>
+          </p:cNvPicPr>
+          <p:nvPr/>
+        </p:nvPicPr>
+        <p:blipFill>
+          <a:blip r:embed="rId4"/>
+          <a:stretch>
+            <a:fillRect/>
+          </a:stretch>
+        </p:blipFill>
+        <p:spPr>
+          <a:xfrm>
+            <a:off x="4297680" y="2240280"/>
+            <a:ext cx="365760" cy="365760"/>
+          </a:xfrm>
+          <a:prstGeom prst="rect">
+            <a:avLst/>
+          </a:prstGeom>
+        </p:spPr>
+      </p:pic>
+      <p:sp>
+        <p:nvSpPr>
+          <p:cNvPr id="56" name="Arc 55"/>
+          <p:cNvSpPr/>
+          <p:nvPr/>
+        </p:nvSpPr>
+        <p:spPr>
+          <a:xfrm>
+            <a:off x="4069080" y="2011680"/>
+            <a:ext cx="822960" cy="822960"/>
+          </a:xfrm>
+          <a:prstGeom prst="arc">
+            <a:avLst>
+              <a:gd name="adj1" fmla="val 9000000"/>
+              <a:gd name="adj2" fmla="val 27000000"/>
+            </a:avLst>
+          </a:prstGeom>
+          <a:ln w="19050">
+            <a:solidFill>
+              <a:srgbClr val="4EA0A6"/>
+            </a:solidFill>
+          </a:ln>
+          <a:effectLst/>
+          <a:noFill/>
+        </p:spPr>
+        <p:style>
+          <a:lnRef idx="1">
+            <a:schemeClr val="accent1"/>
+          </a:lnRef>
+          <a:fillRef idx="3">
+            <a:schemeClr val="accent1"/>
+          </a:fillRef>
+          <a:effectRef idx="2">
+            <a:schemeClr val="accent1"/>
+          </a:effectRef>
+          <a:fontRef idx="minor">
+            <a:schemeClr val="lt1"/>
+          </a:fontRef>
+        </p:style>
+        <p:txBody>
+          <a:bodyPr rtlCol="0" anchor="ctr"/>
+          <a:lstStyle/>
+          <a:p>
+            <a:pPr algn="ctr"/>
+          </a:p>
+        </p:txBody>
+      </p:sp>
+      <p:sp>
+        <p:nvSpPr>
+          <p:cNvPr id="57" name="Oval 56"/>
+          <p:cNvSpPr/>
+          <p:nvPr/>
+        </p:nvSpPr>
+        <p:spPr>
+          <a:xfrm>
+            <a:off x="4448556" y="2802636"/>
+            <a:ext cx="64008" cy="64008"/>
+          </a:xfrm>
+          <a:prstGeom prst="ellipse">
+            <a:avLst/>
+          </a:prstGeom>
+          <a:solidFill>
+            <a:srgbClr val="4EA0A6"/>
+          </a:solidFill>
+          <a:ln>
+            <a:noFill/>
+          </a:ln>
+          <a:effectLst/>
+        </p:spPr>
+        <p:style>
+          <a:lnRef idx="1">
+            <a:schemeClr val="accent1"/>
+          </a:lnRef>
+          <a:fillRef idx="3">
+            <a:schemeClr val="accent1"/>
+          </a:fillRef>
+          <a:effectRef idx="2">
+            <a:schemeClr val="accent1"/>
+          </a:effectRef>
+          <a:fontRef idx="minor">
+            <a:schemeClr val="lt1"/>
+          </a:fontRef>
+        </p:style>
+        <p:txBody>
+          <a:bodyPr rtlCol="0" anchor="ctr"/>
+          <a:lstStyle/>
+          <a:p>
+            <a:pPr algn="ctr"/>
+          </a:p>
+        </p:txBody>
+      </p:sp>
+      <p:sp>
+        <p:nvSpPr>
+          <p:cNvPr id="58" name="TextBox 57"/>
           <p:cNvSpPr txBox="1"/>
           <p:nvPr/>
         </p:nvSpPr>
         <p:spPr>
           <a:xfrm>
-            <a:off x="640080" y="1280160"/>
-            <a:ext cx="8686800" cy="731520"/>
+            <a:off x="4937760" y="2103120"/>
+            <a:ext cx="1097280" cy="731520"/>
           </a:xfrm>
           <a:prstGeom prst="rect">
             <a:avLst/>
           </a:prstGeom>
           <a:noFill/>
+          <a:effectLst/>
         </p:spPr>
         <p:txBody>
           <a:bodyPr wrap="square">
@@ -3832,203 +5940,127 @@
           <a:p>
             <a:pPr>
               <a:lnSpc>
-                <a:spcPct val="130000"/>
+                <a:spcPct val="100000"/>
               </a:lnSpc>
-            </a:pPr>
-            <a:r>
-              <a:rPr sz="1400">
+              <a:defRPr sz="1000" b="1">
                 <a:solidFill>
-                  <a:srgbClr val="4A4A4A"/>
-                </a:solidFill>
-                <a:latin typeface="Segoe UI"/>
-              </a:rPr>
-              <a:t>Execution Excellence is not about doing more — it is about </a:t>
-            </a:r>
-            <a:r>
-              <a:rPr sz="1400" b="1">
-                <a:solidFill>
-                  <a:srgbClr val="3B8276"/>
-                </a:solidFill>
-                <a:latin typeface="Segoe UI Semibold"/>
-              </a:rPr>
-              <a:t>doing the right things</a:t>
-            </a:r>
-            <a:r>
-              <a:rPr sz="1400">
-                <a:solidFill>
-                  <a:srgbClr val="4A4A4A"/>
-                </a:solidFill>
-                <a:latin typeface="Segoe UI"/>
-              </a:rPr>
-              <a:t>, </a:t>
-            </a:r>
-            <a:r>
-              <a:rPr sz="1400" b="1">
-                <a:solidFill>
-                  <a:srgbClr val="3B8276"/>
-                </a:solidFill>
-                <a:latin typeface="Segoe UI Semibold"/>
-              </a:rPr>
-              <a:t>in the right order</a:t>
-            </a:r>
-            <a:r>
-              <a:rPr sz="1400">
-                <a:solidFill>
-                  <a:srgbClr val="4A4A4A"/>
-                </a:solidFill>
-                <a:latin typeface="Segoe UI"/>
-              </a:rPr>
-              <a:t>, and </a:t>
-            </a:r>
-            <a:r>
-              <a:rPr sz="1400" b="1">
-                <a:solidFill>
-                  <a:srgbClr val="3B8276"/>
-                </a:solidFill>
-                <a:latin typeface="Segoe UI Semibold"/>
-              </a:rPr>
-              <a:t>finishing them with discipline.</a:t>
-            </a:r>
-          </a:p>
-        </p:txBody>
-      </p:sp>
-      <p:sp>
-        <p:nvSpPr>
-          <p:cNvPr id="10" name="Rounded Rectangle 9"/>
-          <p:cNvSpPr/>
-          <p:nvPr/>
-        </p:nvSpPr>
-        <p:spPr>
-          <a:xfrm>
-            <a:off x="640080" y="2011680"/>
-            <a:ext cx="3474720" cy="914400"/>
-          </a:xfrm>
-          <a:prstGeom prst="roundRect">
-            <a:avLst>
-              <a:gd name="adj" fmla="val 4000"/>
-            </a:avLst>
-          </a:prstGeom>
-          <a:solidFill>
-            <a:srgbClr val="EDF2F7"/>
-          </a:solidFill>
-          <a:ln>
-            <a:noFill/>
-          </a:ln>
-          <a:effectLst/>
-        </p:spPr>
-        <p:style>
-          <a:lnRef idx="1">
-            <a:schemeClr val="accent1"/>
-          </a:lnRef>
-          <a:fillRef idx="3">
-            <a:schemeClr val="accent1"/>
-          </a:fillRef>
-          <a:effectRef idx="2">
-            <a:schemeClr val="accent1"/>
-          </a:effectRef>
-          <a:fontRef idx="minor">
-            <a:schemeClr val="lt1"/>
-          </a:fontRef>
-        </p:style>
-        <p:txBody>
-          <a:bodyPr rtlCol="0" anchor="ctr"/>
-          <a:lstStyle/>
-          <a:p>
-            <a:pPr algn="ctr"/>
-          </a:p>
-        </p:txBody>
-      </p:sp>
-      <p:sp>
-        <p:nvSpPr>
-          <p:cNvPr id="11" name="Rectangle 10"/>
-          <p:cNvSpPr/>
-          <p:nvPr/>
-        </p:nvSpPr>
-        <p:spPr>
-          <a:xfrm>
-            <a:off x="640080" y="2011680"/>
-            <a:ext cx="73152" cy="914400"/>
-          </a:xfrm>
-          <a:prstGeom prst="rect">
-            <a:avLst/>
-          </a:prstGeom>
-          <a:solidFill>
-            <a:srgbClr val="4A6C98"/>
-          </a:solidFill>
-          <a:ln>
-            <a:noFill/>
-          </a:ln>
-          <a:effectLst/>
-        </p:spPr>
-        <p:style>
-          <a:lnRef idx="1">
-            <a:schemeClr val="accent1"/>
-          </a:lnRef>
-          <a:fillRef idx="3">
-            <a:schemeClr val="accent1"/>
-          </a:fillRef>
-          <a:effectRef idx="2">
-            <a:schemeClr val="accent1"/>
-          </a:effectRef>
-          <a:fontRef idx="minor">
-            <a:schemeClr val="lt1"/>
-          </a:fontRef>
-        </p:style>
-        <p:txBody>
-          <a:bodyPr rtlCol="0" anchor="ctr"/>
-          <a:lstStyle/>
-          <a:p>
-            <a:pPr algn="ctr"/>
-          </a:p>
-        </p:txBody>
-      </p:sp>
-      <p:sp>
-        <p:nvSpPr>
-          <p:cNvPr id="12" name="TextBox 11"/>
-          <p:cNvSpPr txBox="1"/>
-          <p:nvPr/>
-        </p:nvSpPr>
-        <p:spPr>
-          <a:xfrm>
-            <a:off x="822960" y="2121408"/>
-            <a:ext cx="3108960" cy="274320"/>
-          </a:xfrm>
-          <a:prstGeom prst="rect">
-            <a:avLst/>
-          </a:prstGeom>
-          <a:noFill/>
-          <a:effectLst/>
-        </p:spPr>
-        <p:txBody>
-          <a:bodyPr wrap="square">
-            <a:spAutoFit/>
-          </a:bodyPr>
-          <a:lstStyle/>
-          <a:p>
-            <a:pPr algn="l">
-              <a:defRPr sz="1100" b="1">
-                <a:solidFill>
-                  <a:srgbClr val="4A6C98"/>
+                  <a:srgbClr val="222222"/>
                 </a:solidFill>
                 <a:latin typeface="Segoe UI Semibold"/>
               </a:defRPr>
             </a:pPr>
             <a:r>
-              <a:t>FOCUS</a:t>
-            </a:r>
-          </a:p>
-        </p:txBody>
-      </p:sp>
-      <p:sp>
-        <p:nvSpPr>
-          <p:cNvPr id="13" name="TextBox 12"/>
+              <a:t>Execute</a:t>
+            </a:r>
+            <a:br/>
+            <a:r>
+              <a:t>With</a:t>
+            </a:r>
+            <a:br/>
+            <a:r>
+              <a:t>Excellence</a:t>
+            </a:r>
+          </a:p>
+        </p:txBody>
+      </p:sp>
+      <p:sp>
+        <p:nvSpPr>
+          <p:cNvPr id="59" name="Oval 58"/>
+          <p:cNvSpPr/>
+          <p:nvPr/>
+        </p:nvSpPr>
+        <p:spPr>
+          <a:xfrm>
+            <a:off x="6108192" y="4050792"/>
+            <a:ext cx="219456" cy="219456"/>
+          </a:xfrm>
+          <a:prstGeom prst="ellipse">
+            <a:avLst/>
+          </a:prstGeom>
+          <a:noFill/>
+          <a:ln w="19050">
+            <a:solidFill>
+              <a:srgbClr val="5B9858"/>
+            </a:solidFill>
+          </a:ln>
+          <a:effectLst/>
+        </p:spPr>
+        <p:style>
+          <a:lnRef idx="1">
+            <a:schemeClr val="accent1"/>
+          </a:lnRef>
+          <a:fillRef idx="3">
+            <a:schemeClr val="accent1"/>
+          </a:fillRef>
+          <a:effectRef idx="2">
+            <a:schemeClr val="accent1"/>
+          </a:effectRef>
+          <a:fontRef idx="minor">
+            <a:schemeClr val="lt1"/>
+          </a:fontRef>
+        </p:style>
+        <p:txBody>
+          <a:bodyPr rtlCol="0" anchor="ctr"/>
+          <a:lstStyle/>
+          <a:p>
+            <a:pPr algn="ctr"/>
+          </a:p>
+        </p:txBody>
+      </p:sp>
+      <p:sp>
+        <p:nvSpPr>
+          <p:cNvPr id="60" name="Oval 59"/>
+          <p:cNvSpPr/>
+          <p:nvPr/>
+        </p:nvSpPr>
+        <p:spPr>
+          <a:xfrm>
+            <a:off x="6163056" y="4105656"/>
+            <a:ext cx="109728" cy="109728"/>
+          </a:xfrm>
+          <a:prstGeom prst="ellipse">
+            <a:avLst/>
+          </a:prstGeom>
+          <a:solidFill>
+            <a:srgbClr val="5B9858"/>
+          </a:solidFill>
+          <a:ln>
+            <a:noFill/>
+          </a:ln>
+          <a:effectLst/>
+        </p:spPr>
+        <p:style>
+          <a:lnRef idx="1">
+            <a:schemeClr val="accent1"/>
+          </a:lnRef>
+          <a:fillRef idx="3">
+            <a:schemeClr val="accent1"/>
+          </a:fillRef>
+          <a:effectRef idx="2">
+            <a:schemeClr val="accent1"/>
+          </a:effectRef>
+          <a:fontRef idx="minor">
+            <a:schemeClr val="lt1"/>
+          </a:fontRef>
+        </p:style>
+        <p:txBody>
+          <a:bodyPr rtlCol="0" anchor="ctr"/>
+          <a:lstStyle/>
+          <a:p>
+            <a:pPr algn="ctr"/>
+          </a:p>
+        </p:txBody>
+      </p:sp>
+      <p:sp>
+        <p:nvSpPr>
+          <p:cNvPr id="61" name="TextBox 60"/>
           <p:cNvSpPr txBox="1"/>
           <p:nvPr/>
         </p:nvSpPr>
         <p:spPr>
           <a:xfrm>
-            <a:off x="822960" y="2359152"/>
-            <a:ext cx="3108960" cy="502920"/>
+            <a:off x="5943600" y="4297680"/>
+            <a:ext cx="548640" cy="274320"/>
           </a:xfrm>
           <a:prstGeom prst="rect">
             <a:avLst/>
@@ -4042,157 +6074,453 @@
           </a:bodyPr>
           <a:lstStyle/>
           <a:p>
-            <a:pPr algn="l">
-              <a:defRPr sz="950" b="0">
-                <a:solidFill>
-                  <a:srgbClr val="4A4A4A"/>
-                </a:solidFill>
-                <a:latin typeface="Segoe UI"/>
-              </a:defRPr>
-            </a:pPr>
-            <a:r>
-              <a:t>Define outcomes, reduce noise, keep top priorities visible.</a:t>
-            </a:r>
-          </a:p>
-        </p:txBody>
-      </p:sp>
-      <p:sp>
-        <p:nvSpPr>
-          <p:cNvPr id="14" name="Rounded Rectangle 13"/>
-          <p:cNvSpPr/>
-          <p:nvPr/>
-        </p:nvSpPr>
-        <p:spPr>
-          <a:xfrm>
-            <a:off x="4480560" y="2011680"/>
-            <a:ext cx="3474720" cy="914400"/>
-          </a:xfrm>
-          <a:prstGeom prst="roundRect">
-            <a:avLst>
-              <a:gd name="adj" fmla="val 4000"/>
-            </a:avLst>
-          </a:prstGeom>
-          <a:solidFill>
-            <a:srgbClr val="E6F2EF"/>
-          </a:solidFill>
-          <a:ln>
-            <a:noFill/>
-          </a:ln>
-          <a:effectLst/>
-        </p:spPr>
-        <p:style>
-          <a:lnRef idx="1">
-            <a:schemeClr val="accent1"/>
-          </a:lnRef>
-          <a:fillRef idx="3">
-            <a:schemeClr val="accent1"/>
-          </a:fillRef>
-          <a:effectRef idx="2">
-            <a:schemeClr val="accent1"/>
-          </a:effectRef>
-          <a:fontRef idx="minor">
-            <a:schemeClr val="lt1"/>
-          </a:fontRef>
-        </p:style>
-        <p:txBody>
-          <a:bodyPr rtlCol="0" anchor="ctr"/>
-          <a:lstStyle/>
-          <a:p>
-            <a:pPr algn="ctr"/>
-          </a:p>
-        </p:txBody>
-      </p:sp>
-      <p:sp>
-        <p:nvSpPr>
-          <p:cNvPr id="15" name="Rectangle 14"/>
-          <p:cNvSpPr/>
-          <p:nvPr/>
-        </p:nvSpPr>
-        <p:spPr>
-          <a:xfrm>
-            <a:off x="4480560" y="2011680"/>
-            <a:ext cx="73152" cy="914400"/>
-          </a:xfrm>
-          <a:prstGeom prst="rect">
-            <a:avLst/>
-          </a:prstGeom>
-          <a:solidFill>
-            <a:srgbClr val="3B8276"/>
-          </a:solidFill>
-          <a:ln>
-            <a:noFill/>
-          </a:ln>
-          <a:effectLst/>
-        </p:spPr>
-        <p:style>
-          <a:lnRef idx="1">
-            <a:schemeClr val="accent1"/>
-          </a:lnRef>
-          <a:fillRef idx="3">
-            <a:schemeClr val="accent1"/>
-          </a:fillRef>
-          <a:effectRef idx="2">
-            <a:schemeClr val="accent1"/>
-          </a:effectRef>
-          <a:fontRef idx="minor">
-            <a:schemeClr val="lt1"/>
-          </a:fontRef>
-        </p:style>
-        <p:txBody>
-          <a:bodyPr rtlCol="0" anchor="ctr"/>
-          <a:lstStyle/>
-          <a:p>
-            <a:pPr algn="ctr"/>
-          </a:p>
-        </p:txBody>
-      </p:sp>
-      <p:sp>
-        <p:nvSpPr>
-          <p:cNvPr id="16" name="TextBox 15"/>
-          <p:cNvSpPr txBox="1"/>
-          <p:nvPr/>
-        </p:nvSpPr>
-        <p:spPr>
-          <a:xfrm>
-            <a:off x="4663440" y="2121408"/>
-            <a:ext cx="3108960" cy="274320"/>
-          </a:xfrm>
-          <a:prstGeom prst="rect">
-            <a:avLst/>
-          </a:prstGeom>
-          <a:noFill/>
-          <a:effectLst/>
-        </p:spPr>
-        <p:txBody>
-          <a:bodyPr wrap="square">
-            <a:spAutoFit/>
-          </a:bodyPr>
-          <a:lstStyle/>
-          <a:p>
-            <a:pPr algn="l">
+            <a:pPr algn="ctr">
               <a:defRPr sz="1100" b="1">
                 <a:solidFill>
-                  <a:srgbClr val="3B8276"/>
+                  <a:srgbClr val="5B9858"/>
                 </a:solidFill>
                 <a:latin typeface="Segoe UI Semibold"/>
               </a:defRPr>
             </a:pPr>
             <a:r>
-              <a:t>PRIORITIZE</a:t>
-            </a:r>
-          </a:p>
-        </p:txBody>
-      </p:sp>
-      <p:sp>
-        <p:nvSpPr>
-          <p:cNvPr id="17" name="TextBox 16"/>
+              <a:t>Mar</a:t>
+            </a:r>
+          </a:p>
+        </p:txBody>
+      </p:sp>
+      <p:sp>
+        <p:nvSpPr>
+          <p:cNvPr id="62" name="Oval 61"/>
+          <p:cNvSpPr/>
+          <p:nvPr/>
+        </p:nvSpPr>
+        <p:spPr>
+          <a:xfrm>
+            <a:off x="6204204" y="3931920"/>
+            <a:ext cx="27432" cy="27432"/>
+          </a:xfrm>
+          <a:prstGeom prst="ellipse">
+            <a:avLst/>
+          </a:prstGeom>
+          <a:solidFill>
+            <a:srgbClr val="5B9858"/>
+          </a:solidFill>
+          <a:ln>
+            <a:noFill/>
+          </a:ln>
+          <a:effectLst/>
+        </p:spPr>
+        <p:style>
+          <a:lnRef idx="1">
+            <a:schemeClr val="accent1"/>
+          </a:lnRef>
+          <a:fillRef idx="3">
+            <a:schemeClr val="accent1"/>
+          </a:fillRef>
+          <a:effectRef idx="2">
+            <a:schemeClr val="accent1"/>
+          </a:effectRef>
+          <a:fontRef idx="minor">
+            <a:schemeClr val="lt1"/>
+          </a:fontRef>
+        </p:style>
+        <p:txBody>
+          <a:bodyPr rtlCol="0" anchor="ctr"/>
+          <a:lstStyle/>
+          <a:p>
+            <a:pPr algn="ctr"/>
+          </a:p>
+        </p:txBody>
+      </p:sp>
+      <p:sp>
+        <p:nvSpPr>
+          <p:cNvPr id="63" name="Oval 62"/>
+          <p:cNvSpPr/>
+          <p:nvPr/>
+        </p:nvSpPr>
+        <p:spPr>
+          <a:xfrm>
+            <a:off x="6204204" y="3749040"/>
+            <a:ext cx="27432" cy="27432"/>
+          </a:xfrm>
+          <a:prstGeom prst="ellipse">
+            <a:avLst/>
+          </a:prstGeom>
+          <a:solidFill>
+            <a:srgbClr val="5B9858"/>
+          </a:solidFill>
+          <a:ln>
+            <a:noFill/>
+          </a:ln>
+          <a:effectLst/>
+        </p:spPr>
+        <p:style>
+          <a:lnRef idx="1">
+            <a:schemeClr val="accent1"/>
+          </a:lnRef>
+          <a:fillRef idx="3">
+            <a:schemeClr val="accent1"/>
+          </a:fillRef>
+          <a:effectRef idx="2">
+            <a:schemeClr val="accent1"/>
+          </a:effectRef>
+          <a:fontRef idx="minor">
+            <a:schemeClr val="lt1"/>
+          </a:fontRef>
+        </p:style>
+        <p:txBody>
+          <a:bodyPr rtlCol="0" anchor="ctr"/>
+          <a:lstStyle/>
+          <a:p>
+            <a:pPr algn="ctr"/>
+          </a:p>
+        </p:txBody>
+      </p:sp>
+      <p:sp>
+        <p:nvSpPr>
+          <p:cNvPr id="64" name="Oval 63"/>
+          <p:cNvSpPr/>
+          <p:nvPr/>
+        </p:nvSpPr>
+        <p:spPr>
+          <a:xfrm>
+            <a:off x="6204204" y="3566160"/>
+            <a:ext cx="27432" cy="27432"/>
+          </a:xfrm>
+          <a:prstGeom prst="ellipse">
+            <a:avLst/>
+          </a:prstGeom>
+          <a:solidFill>
+            <a:srgbClr val="5B9858"/>
+          </a:solidFill>
+          <a:ln>
+            <a:noFill/>
+          </a:ln>
+          <a:effectLst/>
+        </p:spPr>
+        <p:style>
+          <a:lnRef idx="1">
+            <a:schemeClr val="accent1"/>
+          </a:lnRef>
+          <a:fillRef idx="3">
+            <a:schemeClr val="accent1"/>
+          </a:fillRef>
+          <a:effectRef idx="2">
+            <a:schemeClr val="accent1"/>
+          </a:effectRef>
+          <a:fontRef idx="minor">
+            <a:schemeClr val="lt1"/>
+          </a:fontRef>
+        </p:style>
+        <p:txBody>
+          <a:bodyPr rtlCol="0" anchor="ctr"/>
+          <a:lstStyle/>
+          <a:p>
+            <a:pPr algn="ctr"/>
+          </a:p>
+        </p:txBody>
+      </p:sp>
+      <p:sp>
+        <p:nvSpPr>
+          <p:cNvPr id="65" name="Oval 64"/>
+          <p:cNvSpPr/>
+          <p:nvPr/>
+        </p:nvSpPr>
+        <p:spPr>
+          <a:xfrm>
+            <a:off x="6204204" y="3383280"/>
+            <a:ext cx="27432" cy="27432"/>
+          </a:xfrm>
+          <a:prstGeom prst="ellipse">
+            <a:avLst/>
+          </a:prstGeom>
+          <a:solidFill>
+            <a:srgbClr val="5B9858"/>
+          </a:solidFill>
+          <a:ln>
+            <a:noFill/>
+          </a:ln>
+          <a:effectLst/>
+        </p:spPr>
+        <p:style>
+          <a:lnRef idx="1">
+            <a:schemeClr val="accent1"/>
+          </a:lnRef>
+          <a:fillRef idx="3">
+            <a:schemeClr val="accent1"/>
+          </a:fillRef>
+          <a:effectRef idx="2">
+            <a:schemeClr val="accent1"/>
+          </a:effectRef>
+          <a:fontRef idx="minor">
+            <a:schemeClr val="lt1"/>
+          </a:fontRef>
+        </p:style>
+        <p:txBody>
+          <a:bodyPr rtlCol="0" anchor="ctr"/>
+          <a:lstStyle/>
+          <a:p>
+            <a:pPr algn="ctr"/>
+          </a:p>
+        </p:txBody>
+      </p:sp>
+      <p:sp>
+        <p:nvSpPr>
+          <p:cNvPr id="66" name="Oval 65"/>
+          <p:cNvSpPr/>
+          <p:nvPr/>
+        </p:nvSpPr>
+        <p:spPr>
+          <a:xfrm>
+            <a:off x="6204204" y="3200400"/>
+            <a:ext cx="27432" cy="27432"/>
+          </a:xfrm>
+          <a:prstGeom prst="ellipse">
+            <a:avLst/>
+          </a:prstGeom>
+          <a:solidFill>
+            <a:srgbClr val="5B9858"/>
+          </a:solidFill>
+          <a:ln>
+            <a:noFill/>
+          </a:ln>
+          <a:effectLst/>
+        </p:spPr>
+        <p:style>
+          <a:lnRef idx="1">
+            <a:schemeClr val="accent1"/>
+          </a:lnRef>
+          <a:fillRef idx="3">
+            <a:schemeClr val="accent1"/>
+          </a:fillRef>
+          <a:effectRef idx="2">
+            <a:schemeClr val="accent1"/>
+          </a:effectRef>
+          <a:fontRef idx="minor">
+            <a:schemeClr val="lt1"/>
+          </a:fontRef>
+        </p:style>
+        <p:txBody>
+          <a:bodyPr rtlCol="0" anchor="ctr"/>
+          <a:lstStyle/>
+          <a:p>
+            <a:pPr algn="ctr"/>
+          </a:p>
+        </p:txBody>
+      </p:sp>
+      <p:sp>
+        <p:nvSpPr>
+          <p:cNvPr id="67" name="Oval 66"/>
+          <p:cNvSpPr/>
+          <p:nvPr/>
+        </p:nvSpPr>
+        <p:spPr>
+          <a:xfrm>
+            <a:off x="6204204" y="3017520"/>
+            <a:ext cx="27432" cy="27432"/>
+          </a:xfrm>
+          <a:prstGeom prst="ellipse">
+            <a:avLst/>
+          </a:prstGeom>
+          <a:solidFill>
+            <a:srgbClr val="5B9858"/>
+          </a:solidFill>
+          <a:ln>
+            <a:noFill/>
+          </a:ln>
+          <a:effectLst/>
+        </p:spPr>
+        <p:style>
+          <a:lnRef idx="1">
+            <a:schemeClr val="accent1"/>
+          </a:lnRef>
+          <a:fillRef idx="3">
+            <a:schemeClr val="accent1"/>
+          </a:fillRef>
+          <a:effectRef idx="2">
+            <a:schemeClr val="accent1"/>
+          </a:effectRef>
+          <a:fontRef idx="minor">
+            <a:schemeClr val="lt1"/>
+          </a:fontRef>
+        </p:style>
+        <p:txBody>
+          <a:bodyPr rtlCol="0" anchor="ctr"/>
+          <a:lstStyle/>
+          <a:p>
+            <a:pPr algn="ctr"/>
+          </a:p>
+        </p:txBody>
+      </p:sp>
+      <p:sp>
+        <p:nvSpPr>
+          <p:cNvPr id="68" name="Oval 67"/>
+          <p:cNvSpPr/>
+          <p:nvPr/>
+        </p:nvSpPr>
+        <p:spPr>
+          <a:xfrm>
+            <a:off x="5897880" y="2103120"/>
+            <a:ext cx="640080" cy="640080"/>
+          </a:xfrm>
+          <a:prstGeom prst="ellipse">
+            <a:avLst/>
+          </a:prstGeom>
+          <a:solidFill>
+            <a:srgbClr val="E6EFE5"/>
+          </a:solidFill>
+          <a:ln>
+            <a:noFill/>
+          </a:ln>
+          <a:effectLst/>
+        </p:spPr>
+        <p:style>
+          <a:lnRef idx="1">
+            <a:schemeClr val="accent1"/>
+          </a:lnRef>
+          <a:fillRef idx="3">
+            <a:schemeClr val="accent1"/>
+          </a:fillRef>
+          <a:effectRef idx="2">
+            <a:schemeClr val="accent1"/>
+          </a:effectRef>
+          <a:fontRef idx="minor">
+            <a:schemeClr val="lt1"/>
+          </a:fontRef>
+        </p:style>
+        <p:txBody>
+          <a:bodyPr rtlCol="0" anchor="ctr"/>
+          <a:lstStyle/>
+          <a:p>
+            <a:pPr algn="ctr"/>
+          </a:p>
+        </p:txBody>
+      </p:sp>
+      <p:pic>
+        <p:nvPicPr>
+          <p:cNvPr id="69" name="Picture 68" descr="time_shield.png"/>
+          <p:cNvPicPr>
+            <a:picLocks noChangeAspect="1"/>
+          </p:cNvPicPr>
+          <p:nvPr/>
+        </p:nvPicPr>
+        <p:blipFill>
+          <a:blip r:embed="rId5"/>
+          <a:stretch>
+            <a:fillRect/>
+          </a:stretch>
+        </p:blipFill>
+        <p:spPr>
+          <a:xfrm>
+            <a:off x="6035040" y="2240280"/>
+            <a:ext cx="365760" cy="365760"/>
+          </a:xfrm>
+          <a:prstGeom prst="rect">
+            <a:avLst/>
+          </a:prstGeom>
+        </p:spPr>
+      </p:pic>
+      <p:sp>
+        <p:nvSpPr>
+          <p:cNvPr id="70" name="Arc 69"/>
+          <p:cNvSpPr/>
+          <p:nvPr/>
+        </p:nvSpPr>
+        <p:spPr>
+          <a:xfrm>
+            <a:off x="5806440" y="2011680"/>
+            <a:ext cx="822960" cy="822960"/>
+          </a:xfrm>
+          <a:prstGeom prst="arc">
+            <a:avLst>
+              <a:gd name="adj1" fmla="val 9000000"/>
+              <a:gd name="adj2" fmla="val 27000000"/>
+            </a:avLst>
+          </a:prstGeom>
+          <a:ln w="19050">
+            <a:solidFill>
+              <a:srgbClr val="5B9858"/>
+            </a:solidFill>
+          </a:ln>
+          <a:effectLst/>
+          <a:noFill/>
+        </p:spPr>
+        <p:style>
+          <a:lnRef idx="1">
+            <a:schemeClr val="accent1"/>
+          </a:lnRef>
+          <a:fillRef idx="3">
+            <a:schemeClr val="accent1"/>
+          </a:fillRef>
+          <a:effectRef idx="2">
+            <a:schemeClr val="accent1"/>
+          </a:effectRef>
+          <a:fontRef idx="minor">
+            <a:schemeClr val="lt1"/>
+          </a:fontRef>
+        </p:style>
+        <p:txBody>
+          <a:bodyPr rtlCol="0" anchor="ctr"/>
+          <a:lstStyle/>
+          <a:p>
+            <a:pPr algn="ctr"/>
+          </a:p>
+        </p:txBody>
+      </p:sp>
+      <p:sp>
+        <p:nvSpPr>
+          <p:cNvPr id="71" name="Oval 70"/>
+          <p:cNvSpPr/>
+          <p:nvPr/>
+        </p:nvSpPr>
+        <p:spPr>
+          <a:xfrm>
+            <a:off x="6185916" y="2802636"/>
+            <a:ext cx="64008" cy="64008"/>
+          </a:xfrm>
+          <a:prstGeom prst="ellipse">
+            <a:avLst/>
+          </a:prstGeom>
+          <a:solidFill>
+            <a:srgbClr val="5B9858"/>
+          </a:solidFill>
+          <a:ln>
+            <a:noFill/>
+          </a:ln>
+          <a:effectLst/>
+        </p:spPr>
+        <p:style>
+          <a:lnRef idx="1">
+            <a:schemeClr val="accent1"/>
+          </a:lnRef>
+          <a:fillRef idx="3">
+            <a:schemeClr val="accent1"/>
+          </a:fillRef>
+          <a:effectRef idx="2">
+            <a:schemeClr val="accent1"/>
+          </a:effectRef>
+          <a:fontRef idx="minor">
+            <a:schemeClr val="lt1"/>
+          </a:fontRef>
+        </p:style>
+        <p:txBody>
+          <a:bodyPr rtlCol="0" anchor="ctr"/>
+          <a:lstStyle/>
+          <a:p>
+            <a:pPr algn="ctr"/>
+          </a:p>
+        </p:txBody>
+      </p:sp>
+      <p:sp>
+        <p:nvSpPr>
+          <p:cNvPr id="72" name="TextBox 71"/>
           <p:cNvSpPr txBox="1"/>
           <p:nvPr/>
         </p:nvSpPr>
         <p:spPr>
           <a:xfrm>
-            <a:off x="4663440" y="2359152"/>
-            <a:ext cx="3108960" cy="502920"/>
+            <a:off x="6675120" y="2103120"/>
+            <a:ext cx="1097280" cy="731520"/>
           </a:xfrm>
           <a:prstGeom prst="rect">
             <a:avLst/>
@@ -4206,157 +6534,129 @@
           </a:bodyPr>
           <a:lstStyle/>
           <a:p>
-            <a:pPr algn="l">
-              <a:defRPr sz="950" b="0">
+            <a:pPr>
+              <a:lnSpc>
+                <a:spcPct val="100000"/>
+              </a:lnSpc>
+              <a:defRPr sz="1000" b="1">
                 <a:solidFill>
-                  <a:srgbClr val="4A4A4A"/>
-                </a:solidFill>
-                <a:latin typeface="Segoe UI"/>
-              </a:defRPr>
-            </a:pPr>
-            <a:r>
-              <a:t>Sequence by value, risk, and dependencies.</a:t>
-            </a:r>
-          </a:p>
-        </p:txBody>
-      </p:sp>
-      <p:sp>
-        <p:nvSpPr>
-          <p:cNvPr id="18" name="Rounded Rectangle 17"/>
-          <p:cNvSpPr/>
-          <p:nvPr/>
-        </p:nvSpPr>
-        <p:spPr>
-          <a:xfrm>
-            <a:off x="8321040" y="2011680"/>
-            <a:ext cx="3474720" cy="914400"/>
-          </a:xfrm>
-          <a:prstGeom prst="roundRect">
-            <a:avLst>
-              <a:gd name="adj" fmla="val 4000"/>
-            </a:avLst>
-          </a:prstGeom>
-          <a:solidFill>
-            <a:srgbClr val="FEF8E7"/>
-          </a:solidFill>
-          <a:ln>
-            <a:noFill/>
-          </a:ln>
-          <a:effectLst/>
-        </p:spPr>
-        <p:style>
-          <a:lnRef idx="1">
-            <a:schemeClr val="accent1"/>
-          </a:lnRef>
-          <a:fillRef idx="3">
-            <a:schemeClr val="accent1"/>
-          </a:fillRef>
-          <a:effectRef idx="2">
-            <a:schemeClr val="accent1"/>
-          </a:effectRef>
-          <a:fontRef idx="minor">
-            <a:schemeClr val="lt1"/>
-          </a:fontRef>
-        </p:style>
-        <p:txBody>
-          <a:bodyPr rtlCol="0" anchor="ctr"/>
-          <a:lstStyle/>
-          <a:p>
-            <a:pPr algn="ctr"/>
-          </a:p>
-        </p:txBody>
-      </p:sp>
-      <p:sp>
-        <p:nvSpPr>
-          <p:cNvPr id="19" name="Rectangle 18"/>
-          <p:cNvSpPr/>
-          <p:nvPr/>
-        </p:nvSpPr>
-        <p:spPr>
-          <a:xfrm>
-            <a:off x="8321040" y="2011680"/>
-            <a:ext cx="73152" cy="914400"/>
-          </a:xfrm>
-          <a:prstGeom prst="rect">
-            <a:avLst/>
-          </a:prstGeom>
-          <a:solidFill>
-            <a:srgbClr val="B58D1A"/>
-          </a:solidFill>
-          <a:ln>
-            <a:noFill/>
-          </a:ln>
-          <a:effectLst/>
-        </p:spPr>
-        <p:style>
-          <a:lnRef idx="1">
-            <a:schemeClr val="accent1"/>
-          </a:lnRef>
-          <a:fillRef idx="3">
-            <a:schemeClr val="accent1"/>
-          </a:fillRef>
-          <a:effectRef idx="2">
-            <a:schemeClr val="accent1"/>
-          </a:effectRef>
-          <a:fontRef idx="minor">
-            <a:schemeClr val="lt1"/>
-          </a:fontRef>
-        </p:style>
-        <p:txBody>
-          <a:bodyPr rtlCol="0" anchor="ctr"/>
-          <a:lstStyle/>
-          <a:p>
-            <a:pPr algn="ctr"/>
-          </a:p>
-        </p:txBody>
-      </p:sp>
-      <p:sp>
-        <p:nvSpPr>
-          <p:cNvPr id="20" name="TextBox 19"/>
-          <p:cNvSpPr txBox="1"/>
-          <p:nvPr/>
-        </p:nvSpPr>
-        <p:spPr>
-          <a:xfrm>
-            <a:off x="8503920" y="2121408"/>
-            <a:ext cx="3108960" cy="274320"/>
-          </a:xfrm>
-          <a:prstGeom prst="rect">
-            <a:avLst/>
-          </a:prstGeom>
-          <a:noFill/>
-          <a:effectLst/>
-        </p:spPr>
-        <p:txBody>
-          <a:bodyPr wrap="square">
-            <a:spAutoFit/>
-          </a:bodyPr>
-          <a:lstStyle/>
-          <a:p>
-            <a:pPr algn="l">
-              <a:defRPr sz="1100" b="1">
-                <a:solidFill>
-                  <a:srgbClr val="B58D1A"/>
+                  <a:srgbClr val="222222"/>
                 </a:solidFill>
                 <a:latin typeface="Segoe UI Semibold"/>
               </a:defRPr>
             </a:pPr>
             <a:r>
-              <a:t>DELIVER</a:t>
-            </a:r>
-          </a:p>
-        </p:txBody>
-      </p:sp>
-      <p:sp>
-        <p:nvSpPr>
-          <p:cNvPr id="21" name="TextBox 20"/>
+              <a:t>Attest,</a:t>
+            </a:r>
+            <a:br/>
+            <a:r>
+              <a:t>Remediate,</a:t>
+            </a:r>
+            <a:br/>
+            <a:r>
+              <a:t>Protect</a:t>
+            </a:r>
+          </a:p>
+        </p:txBody>
+      </p:sp>
+      <p:sp>
+        <p:nvSpPr>
+          <p:cNvPr id="73" name="Oval 72"/>
+          <p:cNvSpPr/>
+          <p:nvPr/>
+        </p:nvSpPr>
+        <p:spPr>
+          <a:xfrm>
+            <a:off x="7845552" y="4050792"/>
+            <a:ext cx="219456" cy="219456"/>
+          </a:xfrm>
+          <a:prstGeom prst="ellipse">
+            <a:avLst/>
+          </a:prstGeom>
+          <a:noFill/>
+          <a:ln w="19050">
+            <a:solidFill>
+              <a:srgbClr val="D6A752"/>
+            </a:solidFill>
+          </a:ln>
+          <a:effectLst/>
+        </p:spPr>
+        <p:style>
+          <a:lnRef idx="1">
+            <a:schemeClr val="accent1"/>
+          </a:lnRef>
+          <a:fillRef idx="3">
+            <a:schemeClr val="accent1"/>
+          </a:fillRef>
+          <a:effectRef idx="2">
+            <a:schemeClr val="accent1"/>
+          </a:effectRef>
+          <a:fontRef idx="minor">
+            <a:schemeClr val="lt1"/>
+          </a:fontRef>
+        </p:style>
+        <p:txBody>
+          <a:bodyPr rtlCol="0" anchor="ctr"/>
+          <a:lstStyle/>
+          <a:p>
+            <a:pPr algn="ctr"/>
+          </a:p>
+        </p:txBody>
+      </p:sp>
+      <p:sp>
+        <p:nvSpPr>
+          <p:cNvPr id="74" name="Oval 73"/>
+          <p:cNvSpPr/>
+          <p:nvPr/>
+        </p:nvSpPr>
+        <p:spPr>
+          <a:xfrm>
+            <a:off x="7900416" y="4105656"/>
+            <a:ext cx="109728" cy="109728"/>
+          </a:xfrm>
+          <a:prstGeom prst="ellipse">
+            <a:avLst/>
+          </a:prstGeom>
+          <a:solidFill>
+            <a:srgbClr val="D6A752"/>
+          </a:solidFill>
+          <a:ln>
+            <a:noFill/>
+          </a:ln>
+          <a:effectLst/>
+        </p:spPr>
+        <p:style>
+          <a:lnRef idx="1">
+            <a:schemeClr val="accent1"/>
+          </a:lnRef>
+          <a:fillRef idx="3">
+            <a:schemeClr val="accent1"/>
+          </a:fillRef>
+          <a:effectRef idx="2">
+            <a:schemeClr val="accent1"/>
+          </a:effectRef>
+          <a:fontRef idx="minor">
+            <a:schemeClr val="lt1"/>
+          </a:fontRef>
+        </p:style>
+        <p:txBody>
+          <a:bodyPr rtlCol="0" anchor="ctr"/>
+          <a:lstStyle/>
+          <a:p>
+            <a:pPr algn="ctr"/>
+          </a:p>
+        </p:txBody>
+      </p:sp>
+      <p:sp>
+        <p:nvSpPr>
+          <p:cNvPr id="75" name="TextBox 74"/>
           <p:cNvSpPr txBox="1"/>
           <p:nvPr/>
         </p:nvSpPr>
         <p:spPr>
           <a:xfrm>
-            <a:off x="8503920" y="2359152"/>
-            <a:ext cx="3108960" cy="502920"/>
+            <a:off x="7680960" y="4297680"/>
+            <a:ext cx="548640" cy="274320"/>
           </a:xfrm>
           <a:prstGeom prst="rect">
             <a:avLst/>
@@ -4370,73 +6670,36 @@
           </a:bodyPr>
           <a:lstStyle/>
           <a:p>
-            <a:pPr algn="l">
-              <a:defRPr sz="950" b="0">
-                <a:solidFill>
-                  <a:srgbClr val="4A4A4A"/>
-                </a:solidFill>
-                <a:latin typeface="Segoe UI"/>
-              </a:defRPr>
-            </a:pPr>
-            <a:r>
-              <a:t>Visible checkpoints, ownership, pace, and quality closure.</a:t>
-            </a:r>
-          </a:p>
-        </p:txBody>
-      </p:sp>
-      <p:sp>
-        <p:nvSpPr>
-          <p:cNvPr id="22" name="TextBox 21"/>
-          <p:cNvSpPr txBox="1"/>
-          <p:nvPr/>
-        </p:nvSpPr>
-        <p:spPr>
-          <a:xfrm>
-            <a:off x="640080" y="3200400"/>
-            <a:ext cx="3657600" cy="274320"/>
-          </a:xfrm>
-          <a:prstGeom prst="rect">
-            <a:avLst/>
-          </a:prstGeom>
-          <a:noFill/>
-          <a:effectLst/>
-        </p:spPr>
-        <p:txBody>
-          <a:bodyPr wrap="square">
-            <a:spAutoFit/>
-          </a:bodyPr>
-          <a:lstStyle/>
-          <a:p>
-            <a:pPr algn="l">
+            <a:pPr algn="ctr">
               <a:defRPr sz="1100" b="1">
                 <a:solidFill>
-                  <a:srgbClr val="4A6C98"/>
+                  <a:srgbClr val="D6A752"/>
                 </a:solidFill>
                 <a:latin typeface="Segoe UI Semibold"/>
               </a:defRPr>
             </a:pPr>
             <a:r>
-              <a:t>2026 EXECUTION THEMES</a:t>
-            </a:r>
-          </a:p>
-        </p:txBody>
-      </p:sp>
-      <p:sp>
-        <p:nvSpPr>
-          <p:cNvPr id="23" name="Rectangle 22"/>
-          <p:cNvSpPr/>
-          <p:nvPr/>
-        </p:nvSpPr>
-        <p:spPr>
-          <a:xfrm>
-            <a:off x="640080" y="4297680"/>
-            <a:ext cx="10881360" cy="36576"/>
-          </a:xfrm>
-          <a:prstGeom prst="rect">
-            <a:avLst/>
-          </a:prstGeom>
-          <a:solidFill>
-            <a:srgbClr val="EDF2F7"/>
+              <a:t>Apr</a:t>
+            </a:r>
+          </a:p>
+        </p:txBody>
+      </p:sp>
+      <p:sp>
+        <p:nvSpPr>
+          <p:cNvPr id="76" name="Oval 75"/>
+          <p:cNvSpPr/>
+          <p:nvPr/>
+        </p:nvSpPr>
+        <p:spPr>
+          <a:xfrm>
+            <a:off x="7941564" y="3931920"/>
+            <a:ext cx="27432" cy="27432"/>
+          </a:xfrm>
+          <a:prstGeom prst="ellipse">
+            <a:avLst/>
+          </a:prstGeom>
+          <a:solidFill>
+            <a:srgbClr val="D6A752"/>
           </a:solidFill>
           <a:ln>
             <a:noFill/>
@@ -4467,20 +6730,20 @@
       </p:sp>
       <p:sp>
         <p:nvSpPr>
-          <p:cNvPr id="24" name="Rectangle 23"/>
-          <p:cNvSpPr/>
-          <p:nvPr/>
-        </p:nvSpPr>
-        <p:spPr>
-          <a:xfrm>
-            <a:off x="640080" y="4311396"/>
-            <a:ext cx="10881360" cy="9144"/>
-          </a:xfrm>
-          <a:prstGeom prst="rect">
-            <a:avLst/>
-          </a:prstGeom>
-          <a:solidFill>
-            <a:srgbClr val="4A6C98"/>
+          <p:cNvPr id="77" name="Oval 76"/>
+          <p:cNvSpPr/>
+          <p:nvPr/>
+        </p:nvSpPr>
+        <p:spPr>
+          <a:xfrm>
+            <a:off x="7941564" y="3749040"/>
+            <a:ext cx="27432" cy="27432"/>
+          </a:xfrm>
+          <a:prstGeom prst="ellipse">
+            <a:avLst/>
+          </a:prstGeom>
+          <a:solidFill>
+            <a:srgbClr val="D6A752"/>
           </a:solidFill>
           <a:ln>
             <a:noFill/>
@@ -4511,20 +6774,20 @@
       </p:sp>
       <p:sp>
         <p:nvSpPr>
-          <p:cNvPr id="25" name="Oval 24"/>
-          <p:cNvSpPr/>
-          <p:nvPr/>
-        </p:nvSpPr>
-        <p:spPr>
-          <a:xfrm>
-            <a:off x="1600200" y="4261104"/>
-            <a:ext cx="91440" cy="91440"/>
+          <p:cNvPr id="78" name="Oval 77"/>
+          <p:cNvSpPr/>
+          <p:nvPr/>
+        </p:nvSpPr>
+        <p:spPr>
+          <a:xfrm>
+            <a:off x="7941564" y="3566160"/>
+            <a:ext cx="27432" cy="27432"/>
           </a:xfrm>
           <a:prstGeom prst="ellipse">
             <a:avLst/>
           </a:prstGeom>
           <a:solidFill>
-            <a:srgbClr val="4A6C98"/>
+            <a:srgbClr val="D6A752"/>
           </a:solidFill>
           <a:ln>
             <a:noFill/>
@@ -4555,20 +6818,20 @@
       </p:sp>
       <p:sp>
         <p:nvSpPr>
-          <p:cNvPr id="26" name="Rectangle 25"/>
-          <p:cNvSpPr/>
-          <p:nvPr/>
-        </p:nvSpPr>
-        <p:spPr>
-          <a:xfrm>
-            <a:off x="1641348" y="4251960"/>
-            <a:ext cx="9144" cy="45720"/>
-          </a:xfrm>
-          <a:prstGeom prst="rect">
-            <a:avLst/>
-          </a:prstGeom>
-          <a:solidFill>
-            <a:srgbClr val="4A6C98"/>
+          <p:cNvPr id="79" name="Oval 78"/>
+          <p:cNvSpPr/>
+          <p:nvPr/>
+        </p:nvSpPr>
+        <p:spPr>
+          <a:xfrm>
+            <a:off x="7941564" y="3383280"/>
+            <a:ext cx="27432" cy="27432"/>
+          </a:xfrm>
+          <a:prstGeom prst="ellipse">
+            <a:avLst/>
+          </a:prstGeom>
+          <a:solidFill>
+            <a:srgbClr val="D6A752"/>
           </a:solidFill>
           <a:ln>
             <a:noFill/>
@@ -4599,68 +6862,223 @@
       </p:sp>
       <p:sp>
         <p:nvSpPr>
-          <p:cNvPr id="27" name="Rounded Rectangle 26"/>
-          <p:cNvSpPr/>
-          <p:nvPr/>
-        </p:nvSpPr>
-        <p:spPr>
-          <a:xfrm>
-            <a:off x="731520" y="3566160"/>
-            <a:ext cx="1828800" cy="685800"/>
-          </a:xfrm>
-          <a:prstGeom prst="roundRect">
+          <p:cNvPr id="80" name="Oval 79"/>
+          <p:cNvSpPr/>
+          <p:nvPr/>
+        </p:nvSpPr>
+        <p:spPr>
+          <a:xfrm>
+            <a:off x="7941564" y="3200400"/>
+            <a:ext cx="27432" cy="27432"/>
+          </a:xfrm>
+          <a:prstGeom prst="ellipse">
+            <a:avLst/>
+          </a:prstGeom>
+          <a:solidFill>
+            <a:srgbClr val="D6A752"/>
+          </a:solidFill>
+          <a:ln>
+            <a:noFill/>
+          </a:ln>
+          <a:effectLst/>
+        </p:spPr>
+        <p:style>
+          <a:lnRef idx="1">
+            <a:schemeClr val="accent1"/>
+          </a:lnRef>
+          <a:fillRef idx="3">
+            <a:schemeClr val="accent1"/>
+          </a:fillRef>
+          <a:effectRef idx="2">
+            <a:schemeClr val="accent1"/>
+          </a:effectRef>
+          <a:fontRef idx="minor">
+            <a:schemeClr val="lt1"/>
+          </a:fontRef>
+        </p:style>
+        <p:txBody>
+          <a:bodyPr rtlCol="0" anchor="ctr"/>
+          <a:lstStyle/>
+          <a:p>
+            <a:pPr algn="ctr"/>
+          </a:p>
+        </p:txBody>
+      </p:sp>
+      <p:sp>
+        <p:nvSpPr>
+          <p:cNvPr id="81" name="Oval 80"/>
+          <p:cNvSpPr/>
+          <p:nvPr/>
+        </p:nvSpPr>
+        <p:spPr>
+          <a:xfrm>
+            <a:off x="7941564" y="3017520"/>
+            <a:ext cx="27432" cy="27432"/>
+          </a:xfrm>
+          <a:prstGeom prst="ellipse">
+            <a:avLst/>
+          </a:prstGeom>
+          <a:solidFill>
+            <a:srgbClr val="D6A752"/>
+          </a:solidFill>
+          <a:ln>
+            <a:noFill/>
+          </a:ln>
+          <a:effectLst/>
+        </p:spPr>
+        <p:style>
+          <a:lnRef idx="1">
+            <a:schemeClr val="accent1"/>
+          </a:lnRef>
+          <a:fillRef idx="3">
+            <a:schemeClr val="accent1"/>
+          </a:fillRef>
+          <a:effectRef idx="2">
+            <a:schemeClr val="accent1"/>
+          </a:effectRef>
+          <a:fontRef idx="minor">
+            <a:schemeClr val="lt1"/>
+          </a:fontRef>
+        </p:style>
+        <p:txBody>
+          <a:bodyPr rtlCol="0" anchor="ctr"/>
+          <a:lstStyle/>
+          <a:p>
+            <a:pPr algn="ctr"/>
+          </a:p>
+        </p:txBody>
+      </p:sp>
+      <p:sp>
+        <p:nvSpPr>
+          <p:cNvPr id="82" name="Oval 81"/>
+          <p:cNvSpPr/>
+          <p:nvPr/>
+        </p:nvSpPr>
+        <p:spPr>
+          <a:xfrm>
+            <a:off x="7635240" y="2103120"/>
+            <a:ext cx="640080" cy="640080"/>
+          </a:xfrm>
+          <a:prstGeom prst="ellipse">
+            <a:avLst/>
+          </a:prstGeom>
+          <a:solidFill>
+            <a:srgbClr val="F8F1E5"/>
+          </a:solidFill>
+          <a:ln>
+            <a:noFill/>
+          </a:ln>
+          <a:effectLst/>
+        </p:spPr>
+        <p:style>
+          <a:lnRef idx="1">
+            <a:schemeClr val="accent1"/>
+          </a:lnRef>
+          <a:fillRef idx="3">
+            <a:schemeClr val="accent1"/>
+          </a:fillRef>
+          <a:effectRef idx="2">
+            <a:schemeClr val="accent1"/>
+          </a:effectRef>
+          <a:fontRef idx="minor">
+            <a:schemeClr val="lt1"/>
+          </a:fontRef>
+        </p:style>
+        <p:txBody>
+          <a:bodyPr rtlCol="0" anchor="ctr"/>
+          <a:lstStyle/>
+          <a:p>
+            <a:pPr algn="ctr"/>
+          </a:p>
+        </p:txBody>
+      </p:sp>
+      <p:pic>
+        <p:nvPicPr>
+          <p:cNvPr id="83" name="Picture 82" descr="time_chart.png"/>
+          <p:cNvPicPr>
+            <a:picLocks noChangeAspect="1"/>
+          </p:cNvPicPr>
+          <p:nvPr/>
+        </p:nvPicPr>
+        <p:blipFill>
+          <a:blip r:embed="rId6"/>
+          <a:stretch>
+            <a:fillRect/>
+          </a:stretch>
+        </p:blipFill>
+        <p:spPr>
+          <a:xfrm>
+            <a:off x="7772400" y="2240280"/>
+            <a:ext cx="365760" cy="365760"/>
+          </a:xfrm>
+          <a:prstGeom prst="rect">
+            <a:avLst/>
+          </a:prstGeom>
+        </p:spPr>
+      </p:pic>
+      <p:sp>
+        <p:nvSpPr>
+          <p:cNvPr id="84" name="Arc 83"/>
+          <p:cNvSpPr/>
+          <p:nvPr/>
+        </p:nvSpPr>
+        <p:spPr>
+          <a:xfrm>
+            <a:off x="7543800" y="2011680"/>
+            <a:ext cx="822960" cy="822960"/>
+          </a:xfrm>
+          <a:prstGeom prst="arc">
             <a:avLst>
-              <a:gd name="adj" fmla="val 4000"/>
+              <a:gd name="adj1" fmla="val 9000000"/>
+              <a:gd name="adj2" fmla="val 27000000"/>
             </a:avLst>
           </a:prstGeom>
-          <a:solidFill>
-            <a:srgbClr val="FFFFFF"/>
-          </a:solidFill>
           <a:ln w="19050">
             <a:solidFill>
-              <a:srgbClr val="EDF2F7"/>
+              <a:srgbClr val="D6A752"/>
             </a:solidFill>
           </a:ln>
           <a:effectLst/>
-        </p:spPr>
-        <p:style>
-          <a:lnRef idx="1">
-            <a:schemeClr val="accent1"/>
-          </a:lnRef>
-          <a:fillRef idx="3">
-            <a:schemeClr val="accent1"/>
-          </a:fillRef>
-          <a:effectRef idx="2">
-            <a:schemeClr val="accent1"/>
-          </a:effectRef>
-          <a:fontRef idx="minor">
-            <a:schemeClr val="lt1"/>
-          </a:fontRef>
-        </p:style>
-        <p:txBody>
-          <a:bodyPr rtlCol="0" anchor="ctr"/>
-          <a:lstStyle/>
-          <a:p>
-            <a:pPr algn="ctr"/>
-          </a:p>
-        </p:txBody>
-      </p:sp>
-      <p:sp>
-        <p:nvSpPr>
-          <p:cNvPr id="28" name="Rectangle 27"/>
-          <p:cNvSpPr/>
-          <p:nvPr/>
-        </p:nvSpPr>
-        <p:spPr>
-          <a:xfrm>
-            <a:off x="731520" y="3566160"/>
-            <a:ext cx="1828800" cy="36576"/>
-          </a:xfrm>
-          <a:prstGeom prst="rect">
-            <a:avLst/>
-          </a:prstGeom>
-          <a:solidFill>
-            <a:srgbClr val="4A6C98"/>
+          <a:noFill/>
+        </p:spPr>
+        <p:style>
+          <a:lnRef idx="1">
+            <a:schemeClr val="accent1"/>
+          </a:lnRef>
+          <a:fillRef idx="3">
+            <a:schemeClr val="accent1"/>
+          </a:fillRef>
+          <a:effectRef idx="2">
+            <a:schemeClr val="accent1"/>
+          </a:effectRef>
+          <a:fontRef idx="minor">
+            <a:schemeClr val="lt1"/>
+          </a:fontRef>
+        </p:style>
+        <p:txBody>
+          <a:bodyPr rtlCol="0" anchor="ctr"/>
+          <a:lstStyle/>
+          <a:p>
+            <a:pPr algn="ctr"/>
+          </a:p>
+        </p:txBody>
+      </p:sp>
+      <p:sp>
+        <p:nvSpPr>
+          <p:cNvPr id="85" name="Oval 84"/>
+          <p:cNvSpPr/>
+          <p:nvPr/>
+        </p:nvSpPr>
+        <p:spPr>
+          <a:xfrm>
+            <a:off x="7923276" y="2802636"/>
+            <a:ext cx="64008" cy="64008"/>
+          </a:xfrm>
+          <a:prstGeom prst="ellipse">
+            <a:avLst/>
+          </a:prstGeom>
+          <a:solidFill>
+            <a:srgbClr val="D6A752"/>
           </a:solidFill>
           <a:ln>
             <a:noFill/>
@@ -4691,14 +7109,14 @@
       </p:sp>
       <p:sp>
         <p:nvSpPr>
-          <p:cNvPr id="29" name="TextBox 28"/>
+          <p:cNvPr id="86" name="TextBox 85"/>
           <p:cNvSpPr txBox="1"/>
           <p:nvPr/>
         </p:nvSpPr>
         <p:spPr>
           <a:xfrm>
-            <a:off x="731520" y="3639312"/>
-            <a:ext cx="1828800" cy="228600"/>
+            <a:off x="8412480" y="2103120"/>
+            <a:ext cx="1097280" cy="731520"/>
           </a:xfrm>
           <a:prstGeom prst="rect">
             <a:avLst/>
@@ -4712,30 +7130,133 @@
           </a:bodyPr>
           <a:lstStyle/>
           <a:p>
-            <a:pPr algn="ctr">
-              <a:defRPr sz="1100" b="1">
+            <a:pPr>
+              <a:lnSpc>
+                <a:spcPct val="100000"/>
+              </a:lnSpc>
+              <a:defRPr sz="1000" b="1">
                 <a:solidFill>
-                  <a:srgbClr val="4A6C98"/>
+                  <a:srgbClr val="222222"/>
                 </a:solidFill>
                 <a:latin typeface="Segoe UI Semibold"/>
               </a:defRPr>
             </a:pPr>
             <a:r>
-              <a:t>JAN</a:t>
-            </a:r>
-          </a:p>
-        </p:txBody>
-      </p:sp>
-      <p:sp>
-        <p:nvSpPr>
-          <p:cNvPr id="30" name="TextBox 29"/>
+              <a:t>Reflect,</a:t>
+            </a:r>
+            <a:br/>
+            <a:r>
+              <a:t>Align,</a:t>
+            </a:r>
+            <a:br/>
+            <a:r>
+              <a:t>Accelerate,</a:t>
+            </a:r>
+            <a:br/>
+            <a:r>
+              <a:t>Achieve</a:t>
+            </a:r>
+          </a:p>
+        </p:txBody>
+      </p:sp>
+      <p:sp>
+        <p:nvSpPr>
+          <p:cNvPr id="87" name="Oval 86"/>
+          <p:cNvSpPr/>
+          <p:nvPr/>
+        </p:nvSpPr>
+        <p:spPr>
+          <a:xfrm>
+            <a:off x="9582912" y="4050792"/>
+            <a:ext cx="219456" cy="219456"/>
+          </a:xfrm>
+          <a:prstGeom prst="ellipse">
+            <a:avLst/>
+          </a:prstGeom>
+          <a:noFill/>
+          <a:ln w="19050">
+            <a:solidFill>
+              <a:srgbClr val="478149"/>
+            </a:solidFill>
+          </a:ln>
+          <a:effectLst/>
+        </p:spPr>
+        <p:style>
+          <a:lnRef idx="1">
+            <a:schemeClr val="accent1"/>
+          </a:lnRef>
+          <a:fillRef idx="3">
+            <a:schemeClr val="accent1"/>
+          </a:fillRef>
+          <a:effectRef idx="2">
+            <a:schemeClr val="accent1"/>
+          </a:effectRef>
+          <a:fontRef idx="minor">
+            <a:schemeClr val="lt1"/>
+          </a:fontRef>
+        </p:style>
+        <p:txBody>
+          <a:bodyPr rtlCol="0" anchor="ctr"/>
+          <a:lstStyle/>
+          <a:p>
+            <a:pPr algn="ctr"/>
+          </a:p>
+        </p:txBody>
+      </p:sp>
+      <p:sp>
+        <p:nvSpPr>
+          <p:cNvPr id="88" name="Oval 87"/>
+          <p:cNvSpPr/>
+          <p:nvPr/>
+        </p:nvSpPr>
+        <p:spPr>
+          <a:xfrm>
+            <a:off x="9637776" y="4105656"/>
+            <a:ext cx="109728" cy="109728"/>
+          </a:xfrm>
+          <a:prstGeom prst="ellipse">
+            <a:avLst/>
+          </a:prstGeom>
+          <a:solidFill>
+            <a:srgbClr val="478149"/>
+          </a:solidFill>
+          <a:ln>
+            <a:noFill/>
+          </a:ln>
+          <a:effectLst/>
+        </p:spPr>
+        <p:style>
+          <a:lnRef idx="1">
+            <a:schemeClr val="accent1"/>
+          </a:lnRef>
+          <a:fillRef idx="3">
+            <a:schemeClr val="accent1"/>
+          </a:fillRef>
+          <a:effectRef idx="2">
+            <a:schemeClr val="accent1"/>
+          </a:effectRef>
+          <a:fontRef idx="minor">
+            <a:schemeClr val="lt1"/>
+          </a:fontRef>
+        </p:style>
+        <p:txBody>
+          <a:bodyPr rtlCol="0" anchor="ctr"/>
+          <a:lstStyle/>
+          <a:p>
+            <a:pPr algn="ctr"/>
+          </a:p>
+        </p:txBody>
+      </p:sp>
+      <p:sp>
+        <p:nvSpPr>
+          <p:cNvPr id="89" name="TextBox 88"/>
           <p:cNvSpPr txBox="1"/>
           <p:nvPr/>
         </p:nvSpPr>
         <p:spPr>
           <a:xfrm>
-            <a:off x="822960" y="3858768"/>
-            <a:ext cx="1645920" cy="365760"/>
+            <a:off x="9418320" y="4297680"/>
+            <a:ext cx="548640" cy="274320"/>
           </a:xfrm>
           <a:prstGeom prst="rect">
             <a:avLst/>
@@ -4750,246 +7271,452 @@
           <a:lstStyle/>
           <a:p>
             <a:pPr algn="ctr">
-              <a:defRPr sz="850" b="0">
-                <a:solidFill>
-                  <a:srgbClr val="4A4A4A"/>
-                </a:solidFill>
-                <a:latin typeface="Segoe UI"/>
-              </a:defRPr>
-            </a:pPr>
-            <a:r>
-              <a:t>Clarity First</a:t>
-            </a:r>
-          </a:p>
-        </p:txBody>
-      </p:sp>
-      <p:sp>
-        <p:nvSpPr>
-          <p:cNvPr id="31" name="Oval 30"/>
-          <p:cNvSpPr/>
-          <p:nvPr/>
-        </p:nvSpPr>
-        <p:spPr>
-          <a:xfrm>
-            <a:off x="3749040" y="4261104"/>
-            <a:ext cx="91440" cy="91440"/>
-          </a:xfrm>
-          <a:prstGeom prst="ellipse">
-            <a:avLst/>
-          </a:prstGeom>
-          <a:solidFill>
-            <a:srgbClr val="4A6C98"/>
-          </a:solidFill>
-          <a:ln>
-            <a:noFill/>
-          </a:ln>
-          <a:effectLst/>
-        </p:spPr>
-        <p:style>
-          <a:lnRef idx="1">
-            <a:schemeClr val="accent1"/>
-          </a:lnRef>
-          <a:fillRef idx="3">
-            <a:schemeClr val="accent1"/>
-          </a:fillRef>
-          <a:effectRef idx="2">
-            <a:schemeClr val="accent1"/>
-          </a:effectRef>
-          <a:fontRef idx="minor">
-            <a:schemeClr val="lt1"/>
-          </a:fontRef>
-        </p:style>
-        <p:txBody>
-          <a:bodyPr rtlCol="0" anchor="ctr"/>
-          <a:lstStyle/>
-          <a:p>
-            <a:pPr algn="ctr"/>
-          </a:p>
-        </p:txBody>
-      </p:sp>
-      <p:sp>
-        <p:nvSpPr>
-          <p:cNvPr id="32" name="Rectangle 31"/>
-          <p:cNvSpPr/>
-          <p:nvPr/>
-        </p:nvSpPr>
-        <p:spPr>
-          <a:xfrm>
-            <a:off x="3790188" y="4297680"/>
-            <a:ext cx="9144" cy="137160"/>
-          </a:xfrm>
-          <a:prstGeom prst="rect">
-            <a:avLst/>
-          </a:prstGeom>
-          <a:solidFill>
-            <a:srgbClr val="4A6C98"/>
-          </a:solidFill>
-          <a:ln>
-            <a:noFill/>
-          </a:ln>
-          <a:effectLst/>
-        </p:spPr>
-        <p:style>
-          <a:lnRef idx="1">
-            <a:schemeClr val="accent1"/>
-          </a:lnRef>
-          <a:fillRef idx="3">
-            <a:schemeClr val="accent1"/>
-          </a:fillRef>
-          <a:effectRef idx="2">
-            <a:schemeClr val="accent1"/>
-          </a:effectRef>
-          <a:fontRef idx="minor">
-            <a:schemeClr val="lt1"/>
-          </a:fontRef>
-        </p:style>
-        <p:txBody>
-          <a:bodyPr rtlCol="0" anchor="ctr"/>
-          <a:lstStyle/>
-          <a:p>
-            <a:pPr algn="ctr"/>
-          </a:p>
-        </p:txBody>
-      </p:sp>
-      <p:sp>
-        <p:nvSpPr>
-          <p:cNvPr id="33" name="Rounded Rectangle 32"/>
-          <p:cNvSpPr/>
-          <p:nvPr/>
-        </p:nvSpPr>
-        <p:spPr>
-          <a:xfrm>
-            <a:off x="2880360" y="4434840"/>
-            <a:ext cx="1828800" cy="685800"/>
-          </a:xfrm>
-          <a:prstGeom prst="roundRect">
-            <a:avLst>
-              <a:gd name="adj" fmla="val 4000"/>
-            </a:avLst>
-          </a:prstGeom>
-          <a:solidFill>
-            <a:srgbClr val="FFFFFF"/>
-          </a:solidFill>
-          <a:ln w="19050">
-            <a:solidFill>
-              <a:srgbClr val="EDF2F7"/>
-            </a:solidFill>
-          </a:ln>
-          <a:effectLst/>
-        </p:spPr>
-        <p:style>
-          <a:lnRef idx="1">
-            <a:schemeClr val="accent1"/>
-          </a:lnRef>
-          <a:fillRef idx="3">
-            <a:schemeClr val="accent1"/>
-          </a:fillRef>
-          <a:effectRef idx="2">
-            <a:schemeClr val="accent1"/>
-          </a:effectRef>
-          <a:fontRef idx="minor">
-            <a:schemeClr val="lt1"/>
-          </a:fontRef>
-        </p:style>
-        <p:txBody>
-          <a:bodyPr rtlCol="0" anchor="ctr"/>
-          <a:lstStyle/>
-          <a:p>
-            <a:pPr algn="ctr"/>
-          </a:p>
-        </p:txBody>
-      </p:sp>
-      <p:sp>
-        <p:nvSpPr>
-          <p:cNvPr id="34" name="Rectangle 33"/>
-          <p:cNvSpPr/>
-          <p:nvPr/>
-        </p:nvSpPr>
-        <p:spPr>
-          <a:xfrm>
-            <a:off x="2880360" y="4434840"/>
-            <a:ext cx="1828800" cy="36576"/>
-          </a:xfrm>
-          <a:prstGeom prst="rect">
-            <a:avLst/>
-          </a:prstGeom>
-          <a:solidFill>
-            <a:srgbClr val="4A6C98"/>
-          </a:solidFill>
-          <a:ln>
-            <a:noFill/>
-          </a:ln>
-          <a:effectLst/>
-        </p:spPr>
-        <p:style>
-          <a:lnRef idx="1">
-            <a:schemeClr val="accent1"/>
-          </a:lnRef>
-          <a:fillRef idx="3">
-            <a:schemeClr val="accent1"/>
-          </a:fillRef>
-          <a:effectRef idx="2">
-            <a:schemeClr val="accent1"/>
-          </a:effectRef>
-          <a:fontRef idx="minor">
-            <a:schemeClr val="lt1"/>
-          </a:fontRef>
-        </p:style>
-        <p:txBody>
-          <a:bodyPr rtlCol="0" anchor="ctr"/>
-          <a:lstStyle/>
-          <a:p>
-            <a:pPr algn="ctr"/>
-          </a:p>
-        </p:txBody>
-      </p:sp>
-      <p:sp>
-        <p:nvSpPr>
-          <p:cNvPr id="35" name="TextBox 34"/>
-          <p:cNvSpPr txBox="1"/>
-          <p:nvPr/>
-        </p:nvSpPr>
-        <p:spPr>
-          <a:xfrm>
-            <a:off x="2880360" y="4507992"/>
-            <a:ext cx="1828800" cy="228600"/>
-          </a:xfrm>
-          <a:prstGeom prst="rect">
-            <a:avLst/>
-          </a:prstGeom>
-          <a:noFill/>
-          <a:effectLst/>
-        </p:spPr>
-        <p:txBody>
-          <a:bodyPr wrap="square">
-            <a:spAutoFit/>
-          </a:bodyPr>
-          <a:lstStyle/>
-          <a:p>
-            <a:pPr algn="ctr">
               <a:defRPr sz="1100" b="1">
                 <a:solidFill>
-                  <a:srgbClr val="4A6C98"/>
+                  <a:srgbClr val="478149"/>
                 </a:solidFill>
                 <a:latin typeface="Segoe UI Semibold"/>
               </a:defRPr>
             </a:pPr>
             <a:r>
-              <a:t>FEB</a:t>
-            </a:r>
-          </a:p>
-        </p:txBody>
-      </p:sp>
-      <p:sp>
-        <p:nvSpPr>
-          <p:cNvPr id="36" name="TextBox 35"/>
+              <a:t>May</a:t>
+            </a:r>
+          </a:p>
+        </p:txBody>
+      </p:sp>
+      <p:sp>
+        <p:nvSpPr>
+          <p:cNvPr id="90" name="Oval 89"/>
+          <p:cNvSpPr/>
+          <p:nvPr/>
+        </p:nvSpPr>
+        <p:spPr>
+          <a:xfrm>
+            <a:off x="9678924" y="3931920"/>
+            <a:ext cx="27432" cy="27432"/>
+          </a:xfrm>
+          <a:prstGeom prst="ellipse">
+            <a:avLst/>
+          </a:prstGeom>
+          <a:solidFill>
+            <a:srgbClr val="478149"/>
+          </a:solidFill>
+          <a:ln>
+            <a:noFill/>
+          </a:ln>
+          <a:effectLst/>
+        </p:spPr>
+        <p:style>
+          <a:lnRef idx="1">
+            <a:schemeClr val="accent1"/>
+          </a:lnRef>
+          <a:fillRef idx="3">
+            <a:schemeClr val="accent1"/>
+          </a:fillRef>
+          <a:effectRef idx="2">
+            <a:schemeClr val="accent1"/>
+          </a:effectRef>
+          <a:fontRef idx="minor">
+            <a:schemeClr val="lt1"/>
+          </a:fontRef>
+        </p:style>
+        <p:txBody>
+          <a:bodyPr rtlCol="0" anchor="ctr"/>
+          <a:lstStyle/>
+          <a:p>
+            <a:pPr algn="ctr"/>
+          </a:p>
+        </p:txBody>
+      </p:sp>
+      <p:sp>
+        <p:nvSpPr>
+          <p:cNvPr id="91" name="Oval 90"/>
+          <p:cNvSpPr/>
+          <p:nvPr/>
+        </p:nvSpPr>
+        <p:spPr>
+          <a:xfrm>
+            <a:off x="9678924" y="3749040"/>
+            <a:ext cx="27432" cy="27432"/>
+          </a:xfrm>
+          <a:prstGeom prst="ellipse">
+            <a:avLst/>
+          </a:prstGeom>
+          <a:solidFill>
+            <a:srgbClr val="478149"/>
+          </a:solidFill>
+          <a:ln>
+            <a:noFill/>
+          </a:ln>
+          <a:effectLst/>
+        </p:spPr>
+        <p:style>
+          <a:lnRef idx="1">
+            <a:schemeClr val="accent1"/>
+          </a:lnRef>
+          <a:fillRef idx="3">
+            <a:schemeClr val="accent1"/>
+          </a:fillRef>
+          <a:effectRef idx="2">
+            <a:schemeClr val="accent1"/>
+          </a:effectRef>
+          <a:fontRef idx="minor">
+            <a:schemeClr val="lt1"/>
+          </a:fontRef>
+        </p:style>
+        <p:txBody>
+          <a:bodyPr rtlCol="0" anchor="ctr"/>
+          <a:lstStyle/>
+          <a:p>
+            <a:pPr algn="ctr"/>
+          </a:p>
+        </p:txBody>
+      </p:sp>
+      <p:sp>
+        <p:nvSpPr>
+          <p:cNvPr id="92" name="Oval 91"/>
+          <p:cNvSpPr/>
+          <p:nvPr/>
+        </p:nvSpPr>
+        <p:spPr>
+          <a:xfrm>
+            <a:off x="9678924" y="3566160"/>
+            <a:ext cx="27432" cy="27432"/>
+          </a:xfrm>
+          <a:prstGeom prst="ellipse">
+            <a:avLst/>
+          </a:prstGeom>
+          <a:solidFill>
+            <a:srgbClr val="478149"/>
+          </a:solidFill>
+          <a:ln>
+            <a:noFill/>
+          </a:ln>
+          <a:effectLst/>
+        </p:spPr>
+        <p:style>
+          <a:lnRef idx="1">
+            <a:schemeClr val="accent1"/>
+          </a:lnRef>
+          <a:fillRef idx="3">
+            <a:schemeClr val="accent1"/>
+          </a:fillRef>
+          <a:effectRef idx="2">
+            <a:schemeClr val="accent1"/>
+          </a:effectRef>
+          <a:fontRef idx="minor">
+            <a:schemeClr val="lt1"/>
+          </a:fontRef>
+        </p:style>
+        <p:txBody>
+          <a:bodyPr rtlCol="0" anchor="ctr"/>
+          <a:lstStyle/>
+          <a:p>
+            <a:pPr algn="ctr"/>
+          </a:p>
+        </p:txBody>
+      </p:sp>
+      <p:sp>
+        <p:nvSpPr>
+          <p:cNvPr id="93" name="Oval 92"/>
+          <p:cNvSpPr/>
+          <p:nvPr/>
+        </p:nvSpPr>
+        <p:spPr>
+          <a:xfrm>
+            <a:off x="9678924" y="3383280"/>
+            <a:ext cx="27432" cy="27432"/>
+          </a:xfrm>
+          <a:prstGeom prst="ellipse">
+            <a:avLst/>
+          </a:prstGeom>
+          <a:solidFill>
+            <a:srgbClr val="478149"/>
+          </a:solidFill>
+          <a:ln>
+            <a:noFill/>
+          </a:ln>
+          <a:effectLst/>
+        </p:spPr>
+        <p:style>
+          <a:lnRef idx="1">
+            <a:schemeClr val="accent1"/>
+          </a:lnRef>
+          <a:fillRef idx="3">
+            <a:schemeClr val="accent1"/>
+          </a:fillRef>
+          <a:effectRef idx="2">
+            <a:schemeClr val="accent1"/>
+          </a:effectRef>
+          <a:fontRef idx="minor">
+            <a:schemeClr val="lt1"/>
+          </a:fontRef>
+        </p:style>
+        <p:txBody>
+          <a:bodyPr rtlCol="0" anchor="ctr"/>
+          <a:lstStyle/>
+          <a:p>
+            <a:pPr algn="ctr"/>
+          </a:p>
+        </p:txBody>
+      </p:sp>
+      <p:sp>
+        <p:nvSpPr>
+          <p:cNvPr id="94" name="Oval 93"/>
+          <p:cNvSpPr/>
+          <p:nvPr/>
+        </p:nvSpPr>
+        <p:spPr>
+          <a:xfrm>
+            <a:off x="9678924" y="3200400"/>
+            <a:ext cx="27432" cy="27432"/>
+          </a:xfrm>
+          <a:prstGeom prst="ellipse">
+            <a:avLst/>
+          </a:prstGeom>
+          <a:solidFill>
+            <a:srgbClr val="478149"/>
+          </a:solidFill>
+          <a:ln>
+            <a:noFill/>
+          </a:ln>
+          <a:effectLst/>
+        </p:spPr>
+        <p:style>
+          <a:lnRef idx="1">
+            <a:schemeClr val="accent1"/>
+          </a:lnRef>
+          <a:fillRef idx="3">
+            <a:schemeClr val="accent1"/>
+          </a:fillRef>
+          <a:effectRef idx="2">
+            <a:schemeClr val="accent1"/>
+          </a:effectRef>
+          <a:fontRef idx="minor">
+            <a:schemeClr val="lt1"/>
+          </a:fontRef>
+        </p:style>
+        <p:txBody>
+          <a:bodyPr rtlCol="0" anchor="ctr"/>
+          <a:lstStyle/>
+          <a:p>
+            <a:pPr algn="ctr"/>
+          </a:p>
+        </p:txBody>
+      </p:sp>
+      <p:sp>
+        <p:nvSpPr>
+          <p:cNvPr id="95" name="Oval 94"/>
+          <p:cNvSpPr/>
+          <p:nvPr/>
+        </p:nvSpPr>
+        <p:spPr>
+          <a:xfrm>
+            <a:off x="9678924" y="3017520"/>
+            <a:ext cx="27432" cy="27432"/>
+          </a:xfrm>
+          <a:prstGeom prst="ellipse">
+            <a:avLst/>
+          </a:prstGeom>
+          <a:solidFill>
+            <a:srgbClr val="478149"/>
+          </a:solidFill>
+          <a:ln>
+            <a:noFill/>
+          </a:ln>
+          <a:effectLst/>
+        </p:spPr>
+        <p:style>
+          <a:lnRef idx="1">
+            <a:schemeClr val="accent1"/>
+          </a:lnRef>
+          <a:fillRef idx="3">
+            <a:schemeClr val="accent1"/>
+          </a:fillRef>
+          <a:effectRef idx="2">
+            <a:schemeClr val="accent1"/>
+          </a:effectRef>
+          <a:fontRef idx="minor">
+            <a:schemeClr val="lt1"/>
+          </a:fontRef>
+        </p:style>
+        <p:txBody>
+          <a:bodyPr rtlCol="0" anchor="ctr"/>
+          <a:lstStyle/>
+          <a:p>
+            <a:pPr algn="ctr"/>
+          </a:p>
+        </p:txBody>
+      </p:sp>
+      <p:sp>
+        <p:nvSpPr>
+          <p:cNvPr id="96" name="Oval 95"/>
+          <p:cNvSpPr/>
+          <p:nvPr/>
+        </p:nvSpPr>
+        <p:spPr>
+          <a:xfrm>
+            <a:off x="9372600" y="2103120"/>
+            <a:ext cx="640080" cy="640080"/>
+          </a:xfrm>
+          <a:prstGeom prst="ellipse">
+            <a:avLst/>
+          </a:prstGeom>
+          <a:solidFill>
+            <a:srgbClr val="E3ECE3"/>
+          </a:solidFill>
+          <a:ln>
+            <a:noFill/>
+          </a:ln>
+          <a:effectLst/>
+        </p:spPr>
+        <p:style>
+          <a:lnRef idx="1">
+            <a:schemeClr val="accent1"/>
+          </a:lnRef>
+          <a:fillRef idx="3">
+            <a:schemeClr val="accent1"/>
+          </a:fillRef>
+          <a:effectRef idx="2">
+            <a:schemeClr val="accent1"/>
+          </a:effectRef>
+          <a:fontRef idx="minor">
+            <a:schemeClr val="lt1"/>
+          </a:fontRef>
+        </p:style>
+        <p:txBody>
+          <a:bodyPr rtlCol="0" anchor="ctr"/>
+          <a:lstStyle/>
+          <a:p>
+            <a:pPr algn="ctr"/>
+          </a:p>
+        </p:txBody>
+      </p:sp>
+      <p:pic>
+        <p:nvPicPr>
+          <p:cNvPr id="97" name="Picture 96" descr="time_rocket.png"/>
+          <p:cNvPicPr>
+            <a:picLocks noChangeAspect="1"/>
+          </p:cNvPicPr>
+          <p:nvPr/>
+        </p:nvPicPr>
+        <p:blipFill>
+          <a:blip r:embed="rId7"/>
+          <a:stretch>
+            <a:fillRect/>
+          </a:stretch>
+        </p:blipFill>
+        <p:spPr>
+          <a:xfrm>
+            <a:off x="9509760" y="2240280"/>
+            <a:ext cx="365760" cy="365760"/>
+          </a:xfrm>
+          <a:prstGeom prst="rect">
+            <a:avLst/>
+          </a:prstGeom>
+        </p:spPr>
+      </p:pic>
+      <p:sp>
+        <p:nvSpPr>
+          <p:cNvPr id="98" name="Arc 97"/>
+          <p:cNvSpPr/>
+          <p:nvPr/>
+        </p:nvSpPr>
+        <p:spPr>
+          <a:xfrm>
+            <a:off x="9281160" y="2011680"/>
+            <a:ext cx="822960" cy="822960"/>
+          </a:xfrm>
+          <a:prstGeom prst="arc">
+            <a:avLst>
+              <a:gd name="adj1" fmla="val 9000000"/>
+              <a:gd name="adj2" fmla="val 27000000"/>
+            </a:avLst>
+          </a:prstGeom>
+          <a:ln w="19050">
+            <a:solidFill>
+              <a:srgbClr val="478149"/>
+            </a:solidFill>
+          </a:ln>
+          <a:effectLst/>
+          <a:noFill/>
+        </p:spPr>
+        <p:style>
+          <a:lnRef idx="1">
+            <a:schemeClr val="accent1"/>
+          </a:lnRef>
+          <a:fillRef idx="3">
+            <a:schemeClr val="accent1"/>
+          </a:fillRef>
+          <a:effectRef idx="2">
+            <a:schemeClr val="accent1"/>
+          </a:effectRef>
+          <a:fontRef idx="minor">
+            <a:schemeClr val="lt1"/>
+          </a:fontRef>
+        </p:style>
+        <p:txBody>
+          <a:bodyPr rtlCol="0" anchor="ctr"/>
+          <a:lstStyle/>
+          <a:p>
+            <a:pPr algn="ctr"/>
+          </a:p>
+        </p:txBody>
+      </p:sp>
+      <p:sp>
+        <p:nvSpPr>
+          <p:cNvPr id="99" name="Oval 98"/>
+          <p:cNvSpPr/>
+          <p:nvPr/>
+        </p:nvSpPr>
+        <p:spPr>
+          <a:xfrm>
+            <a:off x="9660636" y="2802636"/>
+            <a:ext cx="64008" cy="64008"/>
+          </a:xfrm>
+          <a:prstGeom prst="ellipse">
+            <a:avLst/>
+          </a:prstGeom>
+          <a:solidFill>
+            <a:srgbClr val="478149"/>
+          </a:solidFill>
+          <a:ln>
+            <a:noFill/>
+          </a:ln>
+          <a:effectLst/>
+        </p:spPr>
+        <p:style>
+          <a:lnRef idx="1">
+            <a:schemeClr val="accent1"/>
+          </a:lnRef>
+          <a:fillRef idx="3">
+            <a:schemeClr val="accent1"/>
+          </a:fillRef>
+          <a:effectRef idx="2">
+            <a:schemeClr val="accent1"/>
+          </a:effectRef>
+          <a:fontRef idx="minor">
+            <a:schemeClr val="lt1"/>
+          </a:fontRef>
+        </p:style>
+        <p:txBody>
+          <a:bodyPr rtlCol="0" anchor="ctr"/>
+          <a:lstStyle/>
+          <a:p>
+            <a:pPr algn="ctr"/>
+          </a:p>
+        </p:txBody>
+      </p:sp>
+      <p:sp>
+        <p:nvSpPr>
+          <p:cNvPr id="100" name="TextBox 99"/>
           <p:cNvSpPr txBox="1"/>
           <p:nvPr/>
         </p:nvSpPr>
         <p:spPr>
           <a:xfrm>
-            <a:off x="2971800" y="4727448"/>
-            <a:ext cx="1645920" cy="365760"/>
+            <a:off x="10149840" y="2103120"/>
+            <a:ext cx="1097280" cy="731520"/>
           </a:xfrm>
           <a:prstGeom prst="rect">
             <a:avLst/>
@@ -5003,1114 +7730,23 @@
           </a:bodyPr>
           <a:lstStyle/>
           <a:p>
-            <a:pPr algn="ctr">
-              <a:defRPr sz="850" b="0">
+            <a:pPr>
+              <a:lnSpc>
+                <a:spcPct val="100000"/>
+              </a:lnSpc>
+              <a:defRPr sz="1000" b="1">
                 <a:solidFill>
-                  <a:srgbClr val="4A4A4A"/>
-                </a:solidFill>
-                <a:latin typeface="Segoe UI"/>
-              </a:defRPr>
-            </a:pPr>
-            <a:r>
-              <a:t>Execute With Excellence</a:t>
-            </a:r>
-          </a:p>
-        </p:txBody>
-      </p:sp>
-      <p:sp>
-        <p:nvSpPr>
-          <p:cNvPr id="37" name="Oval 36"/>
-          <p:cNvSpPr/>
-          <p:nvPr/>
-        </p:nvSpPr>
-        <p:spPr>
-          <a:xfrm>
-            <a:off x="5897880" y="4261104"/>
-            <a:ext cx="91440" cy="91440"/>
-          </a:xfrm>
-          <a:prstGeom prst="ellipse">
-            <a:avLst/>
-          </a:prstGeom>
-          <a:solidFill>
-            <a:srgbClr val="4A6C98"/>
-          </a:solidFill>
-          <a:ln>
-            <a:noFill/>
-          </a:ln>
-          <a:effectLst/>
-        </p:spPr>
-        <p:style>
-          <a:lnRef idx="1">
-            <a:schemeClr val="accent1"/>
-          </a:lnRef>
-          <a:fillRef idx="3">
-            <a:schemeClr val="accent1"/>
-          </a:fillRef>
-          <a:effectRef idx="2">
-            <a:schemeClr val="accent1"/>
-          </a:effectRef>
-          <a:fontRef idx="minor">
-            <a:schemeClr val="lt1"/>
-          </a:fontRef>
-        </p:style>
-        <p:txBody>
-          <a:bodyPr rtlCol="0" anchor="ctr"/>
-          <a:lstStyle/>
-          <a:p>
-            <a:pPr algn="ctr"/>
-          </a:p>
-        </p:txBody>
-      </p:sp>
-      <p:sp>
-        <p:nvSpPr>
-          <p:cNvPr id="38" name="Rectangle 37"/>
-          <p:cNvSpPr/>
-          <p:nvPr/>
-        </p:nvSpPr>
-        <p:spPr>
-          <a:xfrm>
-            <a:off x="5939028" y="4251960"/>
-            <a:ext cx="9144" cy="45720"/>
-          </a:xfrm>
-          <a:prstGeom prst="rect">
-            <a:avLst/>
-          </a:prstGeom>
-          <a:solidFill>
-            <a:srgbClr val="4A6C98"/>
-          </a:solidFill>
-          <a:ln>
-            <a:noFill/>
-          </a:ln>
-          <a:effectLst/>
-        </p:spPr>
-        <p:style>
-          <a:lnRef idx="1">
-            <a:schemeClr val="accent1"/>
-          </a:lnRef>
-          <a:fillRef idx="3">
-            <a:schemeClr val="accent1"/>
-          </a:fillRef>
-          <a:effectRef idx="2">
-            <a:schemeClr val="accent1"/>
-          </a:effectRef>
-          <a:fontRef idx="minor">
-            <a:schemeClr val="lt1"/>
-          </a:fontRef>
-        </p:style>
-        <p:txBody>
-          <a:bodyPr rtlCol="0" anchor="ctr"/>
-          <a:lstStyle/>
-          <a:p>
-            <a:pPr algn="ctr"/>
-          </a:p>
-        </p:txBody>
-      </p:sp>
-      <p:sp>
-        <p:nvSpPr>
-          <p:cNvPr id="39" name="Rounded Rectangle 38"/>
-          <p:cNvSpPr/>
-          <p:nvPr/>
-        </p:nvSpPr>
-        <p:spPr>
-          <a:xfrm>
-            <a:off x="5029200" y="3566160"/>
-            <a:ext cx="1828800" cy="685800"/>
-          </a:xfrm>
-          <a:prstGeom prst="roundRect">
-            <a:avLst>
-              <a:gd name="adj" fmla="val 4000"/>
-            </a:avLst>
-          </a:prstGeom>
-          <a:solidFill>
-            <a:srgbClr val="FFFFFF"/>
-          </a:solidFill>
-          <a:ln w="19050">
-            <a:solidFill>
-              <a:srgbClr val="EDF2F7"/>
-            </a:solidFill>
-          </a:ln>
-          <a:effectLst/>
-        </p:spPr>
-        <p:style>
-          <a:lnRef idx="1">
-            <a:schemeClr val="accent1"/>
-          </a:lnRef>
-          <a:fillRef idx="3">
-            <a:schemeClr val="accent1"/>
-          </a:fillRef>
-          <a:effectRef idx="2">
-            <a:schemeClr val="accent1"/>
-          </a:effectRef>
-          <a:fontRef idx="minor">
-            <a:schemeClr val="lt1"/>
-          </a:fontRef>
-        </p:style>
-        <p:txBody>
-          <a:bodyPr rtlCol="0" anchor="ctr"/>
-          <a:lstStyle/>
-          <a:p>
-            <a:pPr algn="ctr"/>
-          </a:p>
-        </p:txBody>
-      </p:sp>
-      <p:sp>
-        <p:nvSpPr>
-          <p:cNvPr id="40" name="Rectangle 39"/>
-          <p:cNvSpPr/>
-          <p:nvPr/>
-        </p:nvSpPr>
-        <p:spPr>
-          <a:xfrm>
-            <a:off x="5029200" y="3566160"/>
-            <a:ext cx="1828800" cy="36576"/>
-          </a:xfrm>
-          <a:prstGeom prst="rect">
-            <a:avLst/>
-          </a:prstGeom>
-          <a:solidFill>
-            <a:srgbClr val="4A6C98"/>
-          </a:solidFill>
-          <a:ln>
-            <a:noFill/>
-          </a:ln>
-          <a:effectLst/>
-        </p:spPr>
-        <p:style>
-          <a:lnRef idx="1">
-            <a:schemeClr val="accent1"/>
-          </a:lnRef>
-          <a:fillRef idx="3">
-            <a:schemeClr val="accent1"/>
-          </a:fillRef>
-          <a:effectRef idx="2">
-            <a:schemeClr val="accent1"/>
-          </a:effectRef>
-          <a:fontRef idx="minor">
-            <a:schemeClr val="lt1"/>
-          </a:fontRef>
-        </p:style>
-        <p:txBody>
-          <a:bodyPr rtlCol="0" anchor="ctr"/>
-          <a:lstStyle/>
-          <a:p>
-            <a:pPr algn="ctr"/>
-          </a:p>
-        </p:txBody>
-      </p:sp>
-      <p:sp>
-        <p:nvSpPr>
-          <p:cNvPr id="41" name="TextBox 40"/>
-          <p:cNvSpPr txBox="1"/>
-          <p:nvPr/>
-        </p:nvSpPr>
-        <p:spPr>
-          <a:xfrm>
-            <a:off x="5029200" y="3639312"/>
-            <a:ext cx="1828800" cy="228600"/>
-          </a:xfrm>
-          <a:prstGeom prst="rect">
-            <a:avLst/>
-          </a:prstGeom>
-          <a:noFill/>
-          <a:effectLst/>
-        </p:spPr>
-        <p:txBody>
-          <a:bodyPr wrap="square">
-            <a:spAutoFit/>
-          </a:bodyPr>
-          <a:lstStyle/>
-          <a:p>
-            <a:pPr algn="ctr">
-              <a:defRPr sz="1100" b="1">
-                <a:solidFill>
-                  <a:srgbClr val="4A6C98"/>
+                  <a:srgbClr val="222222"/>
                 </a:solidFill>
                 <a:latin typeface="Segoe UI Semibold"/>
               </a:defRPr>
             </a:pPr>
             <a:r>
-              <a:t>MAR</a:t>
-            </a:r>
-          </a:p>
-        </p:txBody>
-      </p:sp>
-      <p:sp>
-        <p:nvSpPr>
-          <p:cNvPr id="42" name="TextBox 41"/>
-          <p:cNvSpPr txBox="1"/>
-          <p:nvPr/>
-        </p:nvSpPr>
-        <p:spPr>
-          <a:xfrm>
-            <a:off x="5120640" y="3858768"/>
-            <a:ext cx="1645920" cy="365760"/>
-          </a:xfrm>
-          <a:prstGeom prst="rect">
-            <a:avLst/>
-          </a:prstGeom>
-          <a:noFill/>
-          <a:effectLst/>
-        </p:spPr>
-        <p:txBody>
-          <a:bodyPr wrap="square">
-            <a:spAutoFit/>
-          </a:bodyPr>
-          <a:lstStyle/>
-          <a:p>
-            <a:pPr algn="ctr">
-              <a:defRPr sz="850" b="0">
-                <a:solidFill>
-                  <a:srgbClr val="4A4A4A"/>
-                </a:solidFill>
-                <a:latin typeface="Segoe UI"/>
-              </a:defRPr>
-            </a:pPr>
-            <a:r>
-              <a:t>Attest, Remediate, Protect</a:t>
-            </a:r>
-          </a:p>
-        </p:txBody>
-      </p:sp>
-      <p:sp>
-        <p:nvSpPr>
-          <p:cNvPr id="43" name="Oval 42"/>
-          <p:cNvSpPr/>
-          <p:nvPr/>
-        </p:nvSpPr>
-        <p:spPr>
-          <a:xfrm>
-            <a:off x="8046720" y="4261104"/>
-            <a:ext cx="91440" cy="91440"/>
-          </a:xfrm>
-          <a:prstGeom prst="ellipse">
-            <a:avLst/>
-          </a:prstGeom>
-          <a:solidFill>
-            <a:srgbClr val="4A6C98"/>
-          </a:solidFill>
-          <a:ln>
-            <a:noFill/>
-          </a:ln>
-          <a:effectLst/>
-        </p:spPr>
-        <p:style>
-          <a:lnRef idx="1">
-            <a:schemeClr val="accent1"/>
-          </a:lnRef>
-          <a:fillRef idx="3">
-            <a:schemeClr val="accent1"/>
-          </a:fillRef>
-          <a:effectRef idx="2">
-            <a:schemeClr val="accent1"/>
-          </a:effectRef>
-          <a:fontRef idx="minor">
-            <a:schemeClr val="lt1"/>
-          </a:fontRef>
-        </p:style>
-        <p:txBody>
-          <a:bodyPr rtlCol="0" anchor="ctr"/>
-          <a:lstStyle/>
-          <a:p>
-            <a:pPr algn="ctr"/>
-          </a:p>
-        </p:txBody>
-      </p:sp>
-      <p:sp>
-        <p:nvSpPr>
-          <p:cNvPr id="44" name="Rectangle 43"/>
-          <p:cNvSpPr/>
-          <p:nvPr/>
-        </p:nvSpPr>
-        <p:spPr>
-          <a:xfrm>
-            <a:off x="8087868" y="4297680"/>
-            <a:ext cx="9144" cy="137160"/>
-          </a:xfrm>
-          <a:prstGeom prst="rect">
-            <a:avLst/>
-          </a:prstGeom>
-          <a:solidFill>
-            <a:srgbClr val="4A6C98"/>
-          </a:solidFill>
-          <a:ln>
-            <a:noFill/>
-          </a:ln>
-          <a:effectLst/>
-        </p:spPr>
-        <p:style>
-          <a:lnRef idx="1">
-            <a:schemeClr val="accent1"/>
-          </a:lnRef>
-          <a:fillRef idx="3">
-            <a:schemeClr val="accent1"/>
-          </a:fillRef>
-          <a:effectRef idx="2">
-            <a:schemeClr val="accent1"/>
-          </a:effectRef>
-          <a:fontRef idx="minor">
-            <a:schemeClr val="lt1"/>
-          </a:fontRef>
-        </p:style>
-        <p:txBody>
-          <a:bodyPr rtlCol="0" anchor="ctr"/>
-          <a:lstStyle/>
-          <a:p>
-            <a:pPr algn="ctr"/>
-          </a:p>
-        </p:txBody>
-      </p:sp>
-      <p:sp>
-        <p:nvSpPr>
-          <p:cNvPr id="45" name="Rounded Rectangle 44"/>
-          <p:cNvSpPr/>
-          <p:nvPr/>
-        </p:nvSpPr>
-        <p:spPr>
-          <a:xfrm>
-            <a:off x="7178040" y="4434840"/>
-            <a:ext cx="1828800" cy="685800"/>
-          </a:xfrm>
-          <a:prstGeom prst="roundRect">
-            <a:avLst>
-              <a:gd name="adj" fmla="val 4000"/>
-            </a:avLst>
-          </a:prstGeom>
-          <a:solidFill>
-            <a:srgbClr val="FFFFFF"/>
-          </a:solidFill>
-          <a:ln w="19050">
-            <a:solidFill>
-              <a:srgbClr val="EDF2F7"/>
-            </a:solidFill>
-          </a:ln>
-          <a:effectLst/>
-        </p:spPr>
-        <p:style>
-          <a:lnRef idx="1">
-            <a:schemeClr val="accent1"/>
-          </a:lnRef>
-          <a:fillRef idx="3">
-            <a:schemeClr val="accent1"/>
-          </a:fillRef>
-          <a:effectRef idx="2">
-            <a:schemeClr val="accent1"/>
-          </a:effectRef>
-          <a:fontRef idx="minor">
-            <a:schemeClr val="lt1"/>
-          </a:fontRef>
-        </p:style>
-        <p:txBody>
-          <a:bodyPr rtlCol="0" anchor="ctr"/>
-          <a:lstStyle/>
-          <a:p>
-            <a:pPr algn="ctr"/>
-          </a:p>
-        </p:txBody>
-      </p:sp>
-      <p:sp>
-        <p:nvSpPr>
-          <p:cNvPr id="46" name="Rectangle 45"/>
-          <p:cNvSpPr/>
-          <p:nvPr/>
-        </p:nvSpPr>
-        <p:spPr>
-          <a:xfrm>
-            <a:off x="7178040" y="4434840"/>
-            <a:ext cx="1828800" cy="36576"/>
-          </a:xfrm>
-          <a:prstGeom prst="rect">
-            <a:avLst/>
-          </a:prstGeom>
-          <a:solidFill>
-            <a:srgbClr val="4A6C98"/>
-          </a:solidFill>
-          <a:ln>
-            <a:noFill/>
-          </a:ln>
-          <a:effectLst/>
-        </p:spPr>
-        <p:style>
-          <a:lnRef idx="1">
-            <a:schemeClr val="accent1"/>
-          </a:lnRef>
-          <a:fillRef idx="3">
-            <a:schemeClr val="accent1"/>
-          </a:fillRef>
-          <a:effectRef idx="2">
-            <a:schemeClr val="accent1"/>
-          </a:effectRef>
-          <a:fontRef idx="minor">
-            <a:schemeClr val="lt1"/>
-          </a:fontRef>
-        </p:style>
-        <p:txBody>
-          <a:bodyPr rtlCol="0" anchor="ctr"/>
-          <a:lstStyle/>
-          <a:p>
-            <a:pPr algn="ctr"/>
-          </a:p>
-        </p:txBody>
-      </p:sp>
-      <p:sp>
-        <p:nvSpPr>
-          <p:cNvPr id="47" name="TextBox 46"/>
-          <p:cNvSpPr txBox="1"/>
-          <p:nvPr/>
-        </p:nvSpPr>
-        <p:spPr>
-          <a:xfrm>
-            <a:off x="7178040" y="4507992"/>
-            <a:ext cx="1828800" cy="228600"/>
-          </a:xfrm>
-          <a:prstGeom prst="rect">
-            <a:avLst/>
-          </a:prstGeom>
-          <a:noFill/>
-          <a:effectLst/>
-        </p:spPr>
-        <p:txBody>
-          <a:bodyPr wrap="square">
-            <a:spAutoFit/>
-          </a:bodyPr>
-          <a:lstStyle/>
-          <a:p>
-            <a:pPr algn="ctr">
-              <a:defRPr sz="1100" b="1">
-                <a:solidFill>
-                  <a:srgbClr val="4A6C98"/>
-                </a:solidFill>
-                <a:latin typeface="Segoe UI Semibold"/>
-              </a:defRPr>
-            </a:pPr>
-            <a:r>
-              <a:t>APR</a:t>
-            </a:r>
-          </a:p>
-        </p:txBody>
-      </p:sp>
-      <p:sp>
-        <p:nvSpPr>
-          <p:cNvPr id="48" name="TextBox 47"/>
-          <p:cNvSpPr txBox="1"/>
-          <p:nvPr/>
-        </p:nvSpPr>
-        <p:spPr>
-          <a:xfrm>
-            <a:off x="7269480" y="4727448"/>
-            <a:ext cx="1645920" cy="365760"/>
-          </a:xfrm>
-          <a:prstGeom prst="rect">
-            <a:avLst/>
-          </a:prstGeom>
-          <a:noFill/>
-          <a:effectLst/>
-        </p:spPr>
-        <p:txBody>
-          <a:bodyPr wrap="square">
-            <a:spAutoFit/>
-          </a:bodyPr>
-          <a:lstStyle/>
-          <a:p>
-            <a:pPr algn="ctr">
-              <a:defRPr sz="850" b="0">
-                <a:solidFill>
-                  <a:srgbClr val="4A4A4A"/>
-                </a:solidFill>
-                <a:latin typeface="Segoe UI"/>
-              </a:defRPr>
-            </a:pPr>
-            <a:r>
-              <a:t>Reflect, Align, Accelerate</a:t>
-            </a:r>
-          </a:p>
-        </p:txBody>
-      </p:sp>
-      <p:sp>
-        <p:nvSpPr>
-          <p:cNvPr id="49" name="Oval 48"/>
-          <p:cNvSpPr/>
-          <p:nvPr/>
-        </p:nvSpPr>
-        <p:spPr>
-          <a:xfrm>
-            <a:off x="10195560" y="4261104"/>
-            <a:ext cx="91440" cy="91440"/>
-          </a:xfrm>
-          <a:prstGeom prst="ellipse">
-            <a:avLst/>
-          </a:prstGeom>
-          <a:solidFill>
-            <a:srgbClr val="4A6C98"/>
-          </a:solidFill>
-          <a:ln>
-            <a:noFill/>
-          </a:ln>
-          <a:effectLst/>
-        </p:spPr>
-        <p:style>
-          <a:lnRef idx="1">
-            <a:schemeClr val="accent1"/>
-          </a:lnRef>
-          <a:fillRef idx="3">
-            <a:schemeClr val="accent1"/>
-          </a:fillRef>
-          <a:effectRef idx="2">
-            <a:schemeClr val="accent1"/>
-          </a:effectRef>
-          <a:fontRef idx="minor">
-            <a:schemeClr val="lt1"/>
-          </a:fontRef>
-        </p:style>
-        <p:txBody>
-          <a:bodyPr rtlCol="0" anchor="ctr"/>
-          <a:lstStyle/>
-          <a:p>
-            <a:pPr algn="ctr"/>
-          </a:p>
-        </p:txBody>
-      </p:sp>
-      <p:sp>
-        <p:nvSpPr>
-          <p:cNvPr id="50" name="Rectangle 49"/>
-          <p:cNvSpPr/>
-          <p:nvPr/>
-        </p:nvSpPr>
-        <p:spPr>
-          <a:xfrm>
-            <a:off x="10236708" y="4251960"/>
-            <a:ext cx="9144" cy="45720"/>
-          </a:xfrm>
-          <a:prstGeom prst="rect">
-            <a:avLst/>
-          </a:prstGeom>
-          <a:solidFill>
-            <a:srgbClr val="4A6C98"/>
-          </a:solidFill>
-          <a:ln>
-            <a:noFill/>
-          </a:ln>
-          <a:effectLst/>
-        </p:spPr>
-        <p:style>
-          <a:lnRef idx="1">
-            <a:schemeClr val="accent1"/>
-          </a:lnRef>
-          <a:fillRef idx="3">
-            <a:schemeClr val="accent1"/>
-          </a:fillRef>
-          <a:effectRef idx="2">
-            <a:schemeClr val="accent1"/>
-          </a:effectRef>
-          <a:fontRef idx="minor">
-            <a:schemeClr val="lt1"/>
-          </a:fontRef>
-        </p:style>
-        <p:txBody>
-          <a:bodyPr rtlCol="0" anchor="ctr"/>
-          <a:lstStyle/>
-          <a:p>
-            <a:pPr algn="ctr"/>
-          </a:p>
-        </p:txBody>
-      </p:sp>
-      <p:sp>
-        <p:nvSpPr>
-          <p:cNvPr id="51" name="Rounded Rectangle 50"/>
-          <p:cNvSpPr/>
-          <p:nvPr/>
-        </p:nvSpPr>
-        <p:spPr>
-          <a:xfrm>
-            <a:off x="9326880" y="3566160"/>
-            <a:ext cx="1828800" cy="685800"/>
-          </a:xfrm>
-          <a:prstGeom prst="roundRect">
-            <a:avLst>
-              <a:gd name="adj" fmla="val 4000"/>
-            </a:avLst>
-          </a:prstGeom>
-          <a:solidFill>
-            <a:srgbClr val="FFFFFF"/>
-          </a:solidFill>
-          <a:ln w="19050">
-            <a:solidFill>
-              <a:srgbClr val="EDF2F7"/>
-            </a:solidFill>
-          </a:ln>
-          <a:effectLst/>
-        </p:spPr>
-        <p:style>
-          <a:lnRef idx="1">
-            <a:schemeClr val="accent1"/>
-          </a:lnRef>
-          <a:fillRef idx="3">
-            <a:schemeClr val="accent1"/>
-          </a:fillRef>
-          <a:effectRef idx="2">
-            <a:schemeClr val="accent1"/>
-          </a:effectRef>
-          <a:fontRef idx="minor">
-            <a:schemeClr val="lt1"/>
-          </a:fontRef>
-        </p:style>
-        <p:txBody>
-          <a:bodyPr rtlCol="0" anchor="ctr"/>
-          <a:lstStyle/>
-          <a:p>
-            <a:pPr algn="ctr"/>
-          </a:p>
-        </p:txBody>
-      </p:sp>
-      <p:sp>
-        <p:nvSpPr>
-          <p:cNvPr id="52" name="Rectangle 51"/>
-          <p:cNvSpPr/>
-          <p:nvPr/>
-        </p:nvSpPr>
-        <p:spPr>
-          <a:xfrm>
-            <a:off x="9326880" y="3566160"/>
-            <a:ext cx="1828800" cy="36576"/>
-          </a:xfrm>
-          <a:prstGeom prst="rect">
-            <a:avLst/>
-          </a:prstGeom>
-          <a:solidFill>
-            <a:srgbClr val="4A6C98"/>
-          </a:solidFill>
-          <a:ln>
-            <a:noFill/>
-          </a:ln>
-          <a:effectLst/>
-        </p:spPr>
-        <p:style>
-          <a:lnRef idx="1">
-            <a:schemeClr val="accent1"/>
-          </a:lnRef>
-          <a:fillRef idx="3">
-            <a:schemeClr val="accent1"/>
-          </a:fillRef>
-          <a:effectRef idx="2">
-            <a:schemeClr val="accent1"/>
-          </a:effectRef>
-          <a:fontRef idx="minor">
-            <a:schemeClr val="lt1"/>
-          </a:fontRef>
-        </p:style>
-        <p:txBody>
-          <a:bodyPr rtlCol="0" anchor="ctr"/>
-          <a:lstStyle/>
-          <a:p>
-            <a:pPr algn="ctr"/>
-          </a:p>
-        </p:txBody>
-      </p:sp>
-      <p:sp>
-        <p:nvSpPr>
-          <p:cNvPr id="53" name="TextBox 52"/>
-          <p:cNvSpPr txBox="1"/>
-          <p:nvPr/>
-        </p:nvSpPr>
-        <p:spPr>
-          <a:xfrm>
-            <a:off x="9326880" y="3639312"/>
-            <a:ext cx="1828800" cy="228600"/>
-          </a:xfrm>
-          <a:prstGeom prst="rect">
-            <a:avLst/>
-          </a:prstGeom>
-          <a:noFill/>
-          <a:effectLst/>
-        </p:spPr>
-        <p:txBody>
-          <a:bodyPr wrap="square">
-            <a:spAutoFit/>
-          </a:bodyPr>
-          <a:lstStyle/>
-          <a:p>
-            <a:pPr algn="ctr">
-              <a:defRPr sz="1100" b="1">
-                <a:solidFill>
-                  <a:srgbClr val="4A6C98"/>
-                </a:solidFill>
-                <a:latin typeface="Segoe UI Semibold"/>
-              </a:defRPr>
-            </a:pPr>
-            <a:r>
-              <a:t>MAY</a:t>
-            </a:r>
-          </a:p>
-        </p:txBody>
-      </p:sp>
-      <p:sp>
-        <p:nvSpPr>
-          <p:cNvPr id="54" name="TextBox 53"/>
-          <p:cNvSpPr txBox="1"/>
-          <p:nvPr/>
-        </p:nvSpPr>
-        <p:spPr>
-          <a:xfrm>
-            <a:off x="9418320" y="3858768"/>
-            <a:ext cx="1645920" cy="365760"/>
-          </a:xfrm>
-          <a:prstGeom prst="rect">
-            <a:avLst/>
-          </a:prstGeom>
-          <a:noFill/>
-          <a:effectLst/>
-        </p:spPr>
-        <p:txBody>
-          <a:bodyPr wrap="square">
-            <a:spAutoFit/>
-          </a:bodyPr>
-          <a:lstStyle/>
-          <a:p>
-            <a:pPr algn="ctr">
-              <a:defRPr sz="850" b="0">
-                <a:solidFill>
-                  <a:srgbClr val="4A4A4A"/>
-                </a:solidFill>
-                <a:latin typeface="Segoe UI"/>
-              </a:defRPr>
-            </a:pPr>
-            <a:r>
-              <a:t>Standardize &amp; Scale</a:t>
-            </a:r>
-          </a:p>
-        </p:txBody>
-      </p:sp>
-      <p:sp>
-        <p:nvSpPr>
-          <p:cNvPr id="55" name="Rounded Rectangle 54"/>
-          <p:cNvSpPr/>
-          <p:nvPr/>
-        </p:nvSpPr>
-        <p:spPr>
-          <a:xfrm>
-            <a:off x="640080" y="5577840"/>
-            <a:ext cx="5303520" cy="914400"/>
-          </a:xfrm>
-          <a:prstGeom prst="roundRect">
-            <a:avLst>
-              <a:gd name="adj" fmla="val 3000"/>
-            </a:avLst>
-          </a:prstGeom>
-          <a:solidFill>
-            <a:srgbClr val="F5F3ED"/>
-          </a:solidFill>
-          <a:ln>
-            <a:noFill/>
-          </a:ln>
-          <a:effectLst/>
-        </p:spPr>
-        <p:style>
-          <a:lnRef idx="1">
-            <a:schemeClr val="accent1"/>
-          </a:lnRef>
-          <a:fillRef idx="3">
-            <a:schemeClr val="accent1"/>
-          </a:fillRef>
-          <a:effectRef idx="2">
-            <a:schemeClr val="accent1"/>
-          </a:effectRef>
-          <a:fontRef idx="minor">
-            <a:schemeClr val="lt1"/>
-          </a:fontRef>
-        </p:style>
-        <p:txBody>
-          <a:bodyPr rtlCol="0" anchor="ctr"/>
-          <a:lstStyle/>
-          <a:p>
-            <a:pPr algn="ctr"/>
-          </a:p>
-        </p:txBody>
-      </p:sp>
-      <p:sp>
-        <p:nvSpPr>
-          <p:cNvPr id="56" name="Rectangle 55"/>
-          <p:cNvSpPr/>
-          <p:nvPr/>
-        </p:nvSpPr>
-        <p:spPr>
-          <a:xfrm>
-            <a:off x="640080" y="5577840"/>
-            <a:ext cx="54864" cy="914400"/>
-          </a:xfrm>
-          <a:prstGeom prst="rect">
-            <a:avLst/>
-          </a:prstGeom>
-          <a:solidFill>
-            <a:srgbClr val="9E8D75"/>
-          </a:solidFill>
-          <a:ln>
-            <a:noFill/>
-          </a:ln>
-          <a:effectLst/>
-        </p:spPr>
-        <p:style>
-          <a:lnRef idx="1">
-            <a:schemeClr val="accent1"/>
-          </a:lnRef>
-          <a:fillRef idx="3">
-            <a:schemeClr val="accent1"/>
-          </a:fillRef>
-          <a:effectRef idx="2">
-            <a:schemeClr val="accent1"/>
-          </a:effectRef>
-          <a:fontRef idx="minor">
-            <a:schemeClr val="lt1"/>
-          </a:fontRef>
-        </p:style>
-        <p:txBody>
-          <a:bodyPr rtlCol="0" anchor="ctr"/>
-          <a:lstStyle/>
-          <a:p>
-            <a:pPr algn="ctr"/>
-          </a:p>
-        </p:txBody>
-      </p:sp>
-      <p:sp>
-        <p:nvSpPr>
-          <p:cNvPr id="57" name="TextBox 56"/>
-          <p:cNvSpPr txBox="1"/>
-          <p:nvPr/>
-        </p:nvSpPr>
-        <p:spPr>
-          <a:xfrm>
-            <a:off x="822960" y="5715000"/>
-            <a:ext cx="4937760" cy="228600"/>
-          </a:xfrm>
-          <a:prstGeom prst="rect">
-            <a:avLst/>
-          </a:prstGeom>
-          <a:noFill/>
-          <a:effectLst/>
-        </p:spPr>
-        <p:txBody>
-          <a:bodyPr wrap="square">
-            <a:spAutoFit/>
-          </a:bodyPr>
-          <a:lstStyle/>
-          <a:p>
-            <a:pPr algn="l">
-              <a:defRPr sz="1000" b="1">
-                <a:solidFill>
-                  <a:srgbClr val="9E8D75"/>
-                </a:solidFill>
-                <a:latin typeface="Segoe UI Semibold"/>
-              </a:defRPr>
-            </a:pPr>
-            <a:r>
-              <a:t>ACTION 1: Mid-Year GPA Discussion</a:t>
-            </a:r>
-          </a:p>
-        </p:txBody>
-      </p:sp>
-      <p:sp>
-        <p:nvSpPr>
-          <p:cNvPr id="58" name="TextBox 57"/>
-          <p:cNvSpPr txBox="1"/>
-          <p:nvPr/>
-        </p:nvSpPr>
-        <p:spPr>
-          <a:xfrm>
-            <a:off x="822960" y="5943600"/>
-            <a:ext cx="4937760" cy="457200"/>
-          </a:xfrm>
-          <a:prstGeom prst="rect">
-            <a:avLst/>
-          </a:prstGeom>
-          <a:noFill/>
-          <a:effectLst/>
-        </p:spPr>
-        <p:txBody>
-          <a:bodyPr wrap="square">
-            <a:spAutoFit/>
-          </a:bodyPr>
-          <a:lstStyle/>
-          <a:p>
-            <a:pPr algn="l">
-              <a:defRPr sz="900" b="0">
-                <a:solidFill>
-                  <a:srgbClr val="4A4A4A"/>
-                </a:solidFill>
-                <a:latin typeface="Segoe UI"/>
-              </a:defRPr>
-            </a:pPr>
-            <a:r>
-              <a:t>Closure by Mon, 6th July  •  LM to setup connects (Workday/Email)</a:t>
+              <a:t>Standardize</a:t>
             </a:r>
             <a:br/>
             <a:r>
-              <a:t>Stakeholders: Portfolio TLs, Tech Leads, Architect, PM, Sr. BAs</a:t>
-            </a:r>
-          </a:p>
-        </p:txBody>
-      </p:sp>
-      <p:sp>
-        <p:nvSpPr>
-          <p:cNvPr id="59" name="Rounded Rectangle 58"/>
-          <p:cNvSpPr/>
-          <p:nvPr/>
-        </p:nvSpPr>
-        <p:spPr>
-          <a:xfrm>
-            <a:off x="6217920" y="5577840"/>
-            <a:ext cx="5303520" cy="914400"/>
-          </a:xfrm>
-          <a:prstGeom prst="roundRect">
-            <a:avLst>
-              <a:gd name="adj" fmla="val 3000"/>
-            </a:avLst>
-          </a:prstGeom>
-          <a:solidFill>
-            <a:srgbClr val="F9EDEC"/>
-          </a:solidFill>
-          <a:ln>
-            <a:noFill/>
-          </a:ln>
-          <a:effectLst/>
-        </p:spPr>
-        <p:style>
-          <a:lnRef idx="1">
-            <a:schemeClr val="accent1"/>
-          </a:lnRef>
-          <a:fillRef idx="3">
-            <a:schemeClr val="accent1"/>
-          </a:fillRef>
-          <a:effectRef idx="2">
-            <a:schemeClr val="accent1"/>
-          </a:effectRef>
-          <a:fontRef idx="minor">
-            <a:schemeClr val="lt1"/>
-          </a:fontRef>
-        </p:style>
-        <p:txBody>
-          <a:bodyPr rtlCol="0" anchor="ctr"/>
-          <a:lstStyle/>
-          <a:p>
-            <a:pPr algn="ctr"/>
-          </a:p>
-        </p:txBody>
-      </p:sp>
-      <p:sp>
-        <p:nvSpPr>
-          <p:cNvPr id="60" name="Rectangle 59"/>
-          <p:cNvSpPr/>
-          <p:nvPr/>
-        </p:nvSpPr>
-        <p:spPr>
-          <a:xfrm>
-            <a:off x="6217920" y="5577840"/>
-            <a:ext cx="54864" cy="914400"/>
-          </a:xfrm>
-          <a:prstGeom prst="rect">
-            <a:avLst/>
-          </a:prstGeom>
-          <a:solidFill>
-            <a:srgbClr val="AF6E6A"/>
-          </a:solidFill>
-          <a:ln>
-            <a:noFill/>
-          </a:ln>
-          <a:effectLst/>
-        </p:spPr>
-        <p:style>
-          <a:lnRef idx="1">
-            <a:schemeClr val="accent1"/>
-          </a:lnRef>
-          <a:fillRef idx="3">
-            <a:schemeClr val="accent1"/>
-          </a:fillRef>
-          <a:effectRef idx="2">
-            <a:schemeClr val="accent1"/>
-          </a:effectRef>
-          <a:fontRef idx="minor">
-            <a:schemeClr val="lt1"/>
-          </a:fontRef>
-        </p:style>
-        <p:txBody>
-          <a:bodyPr rtlCol="0" anchor="ctr"/>
-          <a:lstStyle/>
-          <a:p>
-            <a:pPr algn="ctr"/>
-          </a:p>
-        </p:txBody>
-      </p:sp>
-      <p:sp>
-        <p:nvSpPr>
-          <p:cNvPr id="61" name="TextBox 60"/>
-          <p:cNvSpPr txBox="1"/>
-          <p:nvPr/>
-        </p:nvSpPr>
-        <p:spPr>
-          <a:xfrm>
-            <a:off x="6400800" y="5715000"/>
-            <a:ext cx="4937760" cy="228600"/>
-          </a:xfrm>
-          <a:prstGeom prst="rect">
-            <a:avLst/>
-          </a:prstGeom>
-          <a:noFill/>
-          <a:effectLst/>
-        </p:spPr>
-        <p:txBody>
-          <a:bodyPr wrap="square">
-            <a:spAutoFit/>
-          </a:bodyPr>
-          <a:lstStyle/>
-          <a:p>
-            <a:pPr algn="l">
-              <a:defRPr sz="1000" b="1">
-                <a:solidFill>
-                  <a:srgbClr val="AF6E6A"/>
-                </a:solidFill>
-                <a:latin typeface="Segoe UI Semibold"/>
-              </a:defRPr>
-            </a:pPr>
-            <a:r>
-              <a:t>ACTION 2: Individual Development Plan (IDP)</a:t>
-            </a:r>
-          </a:p>
-        </p:txBody>
-      </p:sp>
-      <p:sp>
-        <p:nvSpPr>
-          <p:cNvPr id="62" name="TextBox 61"/>
-          <p:cNvSpPr txBox="1"/>
-          <p:nvPr/>
-        </p:nvSpPr>
-        <p:spPr>
-          <a:xfrm>
-            <a:off x="6400800" y="5943600"/>
-            <a:ext cx="4937760" cy="457200"/>
-          </a:xfrm>
-          <a:prstGeom prst="rect">
-            <a:avLst/>
-          </a:prstGeom>
-          <a:noFill/>
-          <a:effectLst/>
-        </p:spPr>
-        <p:txBody>
-          <a:bodyPr wrap="square">
-            <a:spAutoFit/>
-          </a:bodyPr>
-          <a:lstStyle/>
-          <a:p>
-            <a:pPr algn="l">
-              <a:defRPr sz="900" b="0">
-                <a:solidFill>
-                  <a:srgbClr val="4A4A4A"/>
-                </a:solidFill>
-                <a:latin typeface="Segoe UI"/>
-              </a:defRPr>
-            </a:pPr>
-            <a:r>
-              <a:t>Complete your IDP Discussion</a:t>
-            </a:r>
-            <a:br/>
-            <a:r>
-              <a:t>Track your development plan and items for 2026</a:t>
+              <a:t>&amp; Scale</a:t>
             </a:r>
           </a:p>
         </p:txBody>
@@ -6169,6 +7805,7 @@
           <a:ln>
             <a:noFill/>
           </a:ln>
+          <a:effectLst/>
         </p:spPr>
         <p:style>
           <a:lnRef idx="1">
@@ -10045,6 +11682,7 @@
           <a:ln>
             <a:noFill/>
           </a:ln>
+          <a:effectLst/>
         </p:spPr>
         <p:style>
           <a:lnRef idx="1">
@@ -11140,6 +12778,7 @@
           <a:ln>
             <a:noFill/>
           </a:ln>
+          <a:effectLst/>
         </p:spPr>
         <p:style>
           <a:lnRef idx="1">
